--- a/docs/PPT JITeCS.pptx
+++ b/docs/PPT JITeCS.pptx
@@ -5,21 +5,21 @@
     <p:sldMasterId id="2147483648" r:id="rId1"/>
   </p:sldMasterIdLst>
   <p:sldIdLst>
-    <p:sldId id="256" r:id="rId2"/>
-    <p:sldId id="257" r:id="rId3"/>
-    <p:sldId id="258" r:id="rId4"/>
-    <p:sldId id="259" r:id="rId5"/>
-    <p:sldId id="260" r:id="rId6"/>
-    <p:sldId id="261" r:id="rId7"/>
-    <p:sldId id="262" r:id="rId8"/>
-    <p:sldId id="263" r:id="rId9"/>
-    <p:sldId id="264" r:id="rId10"/>
-    <p:sldId id="265" r:id="rId11"/>
-    <p:sldId id="266" r:id="rId12"/>
-    <p:sldId id="267" r:id="rId13"/>
-    <p:sldId id="268" r:id="rId14"/>
+    <p:sldId id="256" r:id="rId7"/>
+    <p:sldId id="257" r:id="rId8"/>
+    <p:sldId id="258" r:id="rId9"/>
+    <p:sldId id="259" r:id="rId10"/>
+    <p:sldId id="260" r:id="rId11"/>
+    <p:sldId id="261" r:id="rId12"/>
+    <p:sldId id="262" r:id="rId13"/>
+    <p:sldId id="263" r:id="rId14"/>
+    <p:sldId id="264" r:id="rId15"/>
+    <p:sldId id="265" r:id="rId16"/>
+    <p:sldId id="266" r:id="rId17"/>
+    <p:sldId id="267" r:id="rId18"/>
+    <p:sldId id="268" r:id="rId19"/>
   </p:sldIdLst>
-  <p:sldSz cx="9144000" cy="5143500" type="screen16x9"/>
+  <p:sldSz cx="9144000" cy="5143500" type="screen4x3"/>
   <p:notesSz cx="6858000" cy="9144000"/>
   <p:defaultTextStyle>
     <a:defPPr>
@@ -116,22 +116,6 @@
       </a:defRPr>
     </a:lvl9pPr>
   </p:defaultTextStyle>
-  <p:extLst>
-    <p:ext uri="{EFAFB233-063F-42B5-8137-9DF3F51BA10A}">
-      <p15:sldGuideLst xmlns:p15="http://schemas.microsoft.com/office/powerpoint/2012/main">
-        <p15:guide id="1" orient="horz" pos="2160">
-          <p15:clr>
-            <a:srgbClr val="A4A3A4"/>
-          </p15:clr>
-        </p15:guide>
-        <p15:guide id="2" pos="2880">
-          <p15:clr>
-            <a:srgbClr val="A4A3A4"/>
-          </p15:clr>
-        </p15:guide>
-      </p15:sldGuideLst>
-    </p:ext>
-  </p:extLst>
 </p:presentation>
 </file>
 
@@ -173,9 +157,10 @@
           <a:lstStyle/>
           <a:p>
             <a:r>
-              <a:rPr lang="en-US"/>
+              <a:rPr lang="en-US" smtClean="0"/>
               <a:t>Click to edit Master title style</a:t>
             </a:r>
+            <a:endParaRPr lang="en-US"/>
           </a:p>
         </p:txBody>
       </p:sp>
@@ -291,9 +276,10 @@
           </a:lstStyle>
           <a:p>
             <a:r>
-              <a:rPr lang="en-US"/>
+              <a:rPr lang="en-US" smtClean="0"/>
               <a:t>Click to edit Master subtitle style</a:t>
             </a:r>
+            <a:endParaRPr lang="en-US"/>
           </a:p>
         </p:txBody>
       </p:sp>
@@ -314,7 +300,7 @@
           <a:p>
             <a:fld id="{5BCAD085-E8A6-8845-BD4E-CB4CCA059FC4}" type="datetimeFigureOut">
               <a:rPr lang="en-US" smtClean="0"/>
-              <a:t>4/18/2026</a:t>
+              <a:t>1/27/13</a:t>
             </a:fld>
             <a:endParaRPr lang="en-US"/>
           </a:p>
@@ -408,9 +394,10 @@
           <a:lstStyle/>
           <a:p>
             <a:r>
-              <a:rPr lang="en-US"/>
+              <a:rPr lang="en-US" smtClean="0"/>
               <a:t>Click to edit Master title style</a:t>
             </a:r>
+            <a:endParaRPr lang="en-US"/>
           </a:p>
         </p:txBody>
       </p:sp>
@@ -431,37 +418,38 @@
           <a:p>
             <a:pPr lvl="0"/>
             <a:r>
-              <a:rPr lang="en-US"/>
+              <a:rPr lang="en-US" smtClean="0"/>
               <a:t>Click to edit Master text styles</a:t>
             </a:r>
           </a:p>
           <a:p>
             <a:pPr lvl="1"/>
             <a:r>
-              <a:rPr lang="en-US"/>
+              <a:rPr lang="en-US" smtClean="0"/>
               <a:t>Second level</a:t>
             </a:r>
           </a:p>
           <a:p>
             <a:pPr lvl="2"/>
             <a:r>
-              <a:rPr lang="en-US"/>
+              <a:rPr lang="en-US" smtClean="0"/>
               <a:t>Third level</a:t>
             </a:r>
           </a:p>
           <a:p>
             <a:pPr lvl="3"/>
             <a:r>
-              <a:rPr lang="en-US"/>
+              <a:rPr lang="en-US" smtClean="0"/>
               <a:t>Fourth level</a:t>
             </a:r>
           </a:p>
           <a:p>
             <a:pPr lvl="4"/>
             <a:r>
-              <a:rPr lang="en-US"/>
+              <a:rPr lang="en-US" smtClean="0"/>
               <a:t>Fifth level</a:t>
             </a:r>
+            <a:endParaRPr lang="en-US"/>
           </a:p>
         </p:txBody>
       </p:sp>
@@ -482,7 +470,7 @@
           <a:p>
             <a:fld id="{5BCAD085-E8A6-8845-BD4E-CB4CCA059FC4}" type="datetimeFigureOut">
               <a:rPr lang="en-US" smtClean="0"/>
-              <a:t>4/18/2026</a:t>
+              <a:t>1/27/13</a:t>
             </a:fld>
             <a:endParaRPr lang="en-US"/>
           </a:p>
@@ -581,9 +569,10 @@
           <a:lstStyle/>
           <a:p>
             <a:r>
-              <a:rPr lang="en-US"/>
+              <a:rPr lang="en-US" smtClean="0"/>
               <a:t>Click to edit Master title style</a:t>
             </a:r>
+            <a:endParaRPr lang="en-US"/>
           </a:p>
         </p:txBody>
       </p:sp>
@@ -609,37 +598,38 @@
           <a:p>
             <a:pPr lvl="0"/>
             <a:r>
-              <a:rPr lang="en-US"/>
+              <a:rPr lang="en-US" smtClean="0"/>
               <a:t>Click to edit Master text styles</a:t>
             </a:r>
           </a:p>
           <a:p>
             <a:pPr lvl="1"/>
             <a:r>
-              <a:rPr lang="en-US"/>
+              <a:rPr lang="en-US" smtClean="0"/>
               <a:t>Second level</a:t>
             </a:r>
           </a:p>
           <a:p>
             <a:pPr lvl="2"/>
             <a:r>
-              <a:rPr lang="en-US"/>
+              <a:rPr lang="en-US" smtClean="0"/>
               <a:t>Third level</a:t>
             </a:r>
           </a:p>
           <a:p>
             <a:pPr lvl="3"/>
             <a:r>
-              <a:rPr lang="en-US"/>
+              <a:rPr lang="en-US" smtClean="0"/>
               <a:t>Fourth level</a:t>
             </a:r>
           </a:p>
           <a:p>
             <a:pPr lvl="4"/>
             <a:r>
-              <a:rPr lang="en-US"/>
+              <a:rPr lang="en-US" smtClean="0"/>
               <a:t>Fifth level</a:t>
             </a:r>
+            <a:endParaRPr lang="en-US"/>
           </a:p>
         </p:txBody>
       </p:sp>
@@ -660,7 +650,7 @@
           <a:p>
             <a:fld id="{5BCAD085-E8A6-8845-BD4E-CB4CCA059FC4}" type="datetimeFigureOut">
               <a:rPr lang="en-US" smtClean="0"/>
-              <a:t>4/18/2026</a:t>
+              <a:t>1/27/13</a:t>
             </a:fld>
             <a:endParaRPr lang="en-US"/>
           </a:p>
@@ -754,9 +744,10 @@
           <a:lstStyle/>
           <a:p>
             <a:r>
-              <a:rPr lang="en-US"/>
+              <a:rPr lang="en-US" smtClean="0"/>
               <a:t>Click to edit Master title style</a:t>
             </a:r>
+            <a:endParaRPr lang="en-US"/>
           </a:p>
         </p:txBody>
       </p:sp>
@@ -777,37 +768,38 @@
           <a:p>
             <a:pPr lvl="0"/>
             <a:r>
-              <a:rPr lang="en-US"/>
+              <a:rPr lang="en-US" smtClean="0"/>
               <a:t>Click to edit Master text styles</a:t>
             </a:r>
           </a:p>
           <a:p>
             <a:pPr lvl="1"/>
             <a:r>
-              <a:rPr lang="en-US"/>
+              <a:rPr lang="en-US" smtClean="0"/>
               <a:t>Second level</a:t>
             </a:r>
           </a:p>
           <a:p>
             <a:pPr lvl="2"/>
             <a:r>
-              <a:rPr lang="en-US"/>
+              <a:rPr lang="en-US" smtClean="0"/>
               <a:t>Third level</a:t>
             </a:r>
           </a:p>
           <a:p>
             <a:pPr lvl="3"/>
             <a:r>
-              <a:rPr lang="en-US"/>
+              <a:rPr lang="en-US" smtClean="0"/>
               <a:t>Fourth level</a:t>
             </a:r>
           </a:p>
           <a:p>
             <a:pPr lvl="4"/>
             <a:r>
-              <a:rPr lang="en-US"/>
+              <a:rPr lang="en-US" smtClean="0"/>
               <a:t>Fifth level</a:t>
             </a:r>
+            <a:endParaRPr lang="en-US"/>
           </a:p>
         </p:txBody>
       </p:sp>
@@ -828,7 +820,7 @@
           <a:p>
             <a:fld id="{5BCAD085-E8A6-8845-BD4E-CB4CCA059FC4}" type="datetimeFigureOut">
               <a:rPr lang="en-US" smtClean="0"/>
-              <a:t>4/18/2026</a:t>
+              <a:t>1/27/13</a:t>
             </a:fld>
             <a:endParaRPr lang="en-US"/>
           </a:p>
@@ -931,9 +923,10 @@
           </a:lstStyle>
           <a:p>
             <a:r>
-              <a:rPr lang="en-US"/>
+              <a:rPr lang="en-US" smtClean="0"/>
               <a:t>Click to edit Master title style</a:t>
             </a:r>
+            <a:endParaRPr lang="en-US"/>
           </a:p>
         </p:txBody>
       </p:sp>
@@ -1050,7 +1043,7 @@
           <a:p>
             <a:pPr lvl="0"/>
             <a:r>
-              <a:rPr lang="en-US"/>
+              <a:rPr lang="en-US" smtClean="0"/>
               <a:t>Click to edit Master text styles</a:t>
             </a:r>
           </a:p>
@@ -1073,7 +1066,7 @@
           <a:p>
             <a:fld id="{5BCAD085-E8A6-8845-BD4E-CB4CCA059FC4}" type="datetimeFigureOut">
               <a:rPr lang="en-US" smtClean="0"/>
-              <a:t>4/18/2026</a:t>
+              <a:t>1/27/13</a:t>
             </a:fld>
             <a:endParaRPr lang="en-US"/>
           </a:p>
@@ -1167,9 +1160,10 @@
           <a:lstStyle/>
           <a:p>
             <a:r>
-              <a:rPr lang="en-US"/>
+              <a:rPr lang="en-US" smtClean="0"/>
               <a:t>Click to edit Master title style</a:t>
             </a:r>
+            <a:endParaRPr lang="en-US"/>
           </a:p>
         </p:txBody>
       </p:sp>
@@ -1223,37 +1217,38 @@
           <a:p>
             <a:pPr lvl="0"/>
             <a:r>
-              <a:rPr lang="en-US"/>
+              <a:rPr lang="en-US" smtClean="0"/>
               <a:t>Click to edit Master text styles</a:t>
             </a:r>
           </a:p>
           <a:p>
             <a:pPr lvl="1"/>
             <a:r>
-              <a:rPr lang="en-US"/>
+              <a:rPr lang="en-US" smtClean="0"/>
               <a:t>Second level</a:t>
             </a:r>
           </a:p>
           <a:p>
             <a:pPr lvl="2"/>
             <a:r>
-              <a:rPr lang="en-US"/>
+              <a:rPr lang="en-US" smtClean="0"/>
               <a:t>Third level</a:t>
             </a:r>
           </a:p>
           <a:p>
             <a:pPr lvl="3"/>
             <a:r>
-              <a:rPr lang="en-US"/>
+              <a:rPr lang="en-US" smtClean="0"/>
               <a:t>Fourth level</a:t>
             </a:r>
           </a:p>
           <a:p>
             <a:pPr lvl="4"/>
             <a:r>
-              <a:rPr lang="en-US"/>
+              <a:rPr lang="en-US" smtClean="0"/>
               <a:t>Fifth level</a:t>
             </a:r>
+            <a:endParaRPr lang="en-US"/>
           </a:p>
         </p:txBody>
       </p:sp>
@@ -1307,37 +1302,38 @@
           <a:p>
             <a:pPr lvl="0"/>
             <a:r>
-              <a:rPr lang="en-US"/>
+              <a:rPr lang="en-US" smtClean="0"/>
               <a:t>Click to edit Master text styles</a:t>
             </a:r>
           </a:p>
           <a:p>
             <a:pPr lvl="1"/>
             <a:r>
-              <a:rPr lang="en-US"/>
+              <a:rPr lang="en-US" smtClean="0"/>
               <a:t>Second level</a:t>
             </a:r>
           </a:p>
           <a:p>
             <a:pPr lvl="2"/>
             <a:r>
-              <a:rPr lang="en-US"/>
+              <a:rPr lang="en-US" smtClean="0"/>
               <a:t>Third level</a:t>
             </a:r>
           </a:p>
           <a:p>
             <a:pPr lvl="3"/>
             <a:r>
-              <a:rPr lang="en-US"/>
+              <a:rPr lang="en-US" smtClean="0"/>
               <a:t>Fourth level</a:t>
             </a:r>
           </a:p>
           <a:p>
             <a:pPr lvl="4"/>
             <a:r>
-              <a:rPr lang="en-US"/>
+              <a:rPr lang="en-US" smtClean="0"/>
               <a:t>Fifth level</a:t>
             </a:r>
+            <a:endParaRPr lang="en-US"/>
           </a:p>
         </p:txBody>
       </p:sp>
@@ -1358,7 +1354,7 @@
           <a:p>
             <a:fld id="{5BCAD085-E8A6-8845-BD4E-CB4CCA059FC4}" type="datetimeFigureOut">
               <a:rPr lang="en-US" smtClean="0"/>
-              <a:t>4/18/2026</a:t>
+              <a:t>1/27/13</a:t>
             </a:fld>
             <a:endParaRPr lang="en-US"/>
           </a:p>
@@ -1456,9 +1452,10 @@
           </a:lstStyle>
           <a:p>
             <a:r>
-              <a:rPr lang="en-US"/>
+              <a:rPr lang="en-US" smtClean="0"/>
               <a:t>Click to edit Master title style</a:t>
             </a:r>
+            <a:endParaRPr lang="en-US"/>
           </a:p>
         </p:txBody>
       </p:sp>
@@ -1521,7 +1518,7 @@
           <a:p>
             <a:pPr lvl="0"/>
             <a:r>
-              <a:rPr lang="en-US"/>
+              <a:rPr lang="en-US" smtClean="0"/>
               <a:t>Click to edit Master text styles</a:t>
             </a:r>
           </a:p>
@@ -1577,37 +1574,38 @@
           <a:p>
             <a:pPr lvl="0"/>
             <a:r>
-              <a:rPr lang="en-US"/>
+              <a:rPr lang="en-US" smtClean="0"/>
               <a:t>Click to edit Master text styles</a:t>
             </a:r>
           </a:p>
           <a:p>
             <a:pPr lvl="1"/>
             <a:r>
-              <a:rPr lang="en-US"/>
+              <a:rPr lang="en-US" smtClean="0"/>
               <a:t>Second level</a:t>
             </a:r>
           </a:p>
           <a:p>
             <a:pPr lvl="2"/>
             <a:r>
-              <a:rPr lang="en-US"/>
+              <a:rPr lang="en-US" smtClean="0"/>
               <a:t>Third level</a:t>
             </a:r>
           </a:p>
           <a:p>
             <a:pPr lvl="3"/>
             <a:r>
-              <a:rPr lang="en-US"/>
+              <a:rPr lang="en-US" smtClean="0"/>
               <a:t>Fourth level</a:t>
             </a:r>
           </a:p>
           <a:p>
             <a:pPr lvl="4"/>
             <a:r>
-              <a:rPr lang="en-US"/>
+              <a:rPr lang="en-US" smtClean="0"/>
               <a:t>Fifth level</a:t>
             </a:r>
+            <a:endParaRPr lang="en-US"/>
           </a:p>
         </p:txBody>
       </p:sp>
@@ -1670,7 +1668,7 @@
           <a:p>
             <a:pPr lvl="0"/>
             <a:r>
-              <a:rPr lang="en-US"/>
+              <a:rPr lang="en-US" smtClean="0"/>
               <a:t>Click to edit Master text styles</a:t>
             </a:r>
           </a:p>
@@ -1726,37 +1724,38 @@
           <a:p>
             <a:pPr lvl="0"/>
             <a:r>
-              <a:rPr lang="en-US"/>
+              <a:rPr lang="en-US" smtClean="0"/>
               <a:t>Click to edit Master text styles</a:t>
             </a:r>
           </a:p>
           <a:p>
             <a:pPr lvl="1"/>
             <a:r>
-              <a:rPr lang="en-US"/>
+              <a:rPr lang="en-US" smtClean="0"/>
               <a:t>Second level</a:t>
             </a:r>
           </a:p>
           <a:p>
             <a:pPr lvl="2"/>
             <a:r>
-              <a:rPr lang="en-US"/>
+              <a:rPr lang="en-US" smtClean="0"/>
               <a:t>Third level</a:t>
             </a:r>
           </a:p>
           <a:p>
             <a:pPr lvl="3"/>
             <a:r>
-              <a:rPr lang="en-US"/>
+              <a:rPr lang="en-US" smtClean="0"/>
               <a:t>Fourth level</a:t>
             </a:r>
           </a:p>
           <a:p>
             <a:pPr lvl="4"/>
             <a:r>
-              <a:rPr lang="en-US"/>
+              <a:rPr lang="en-US" smtClean="0"/>
               <a:t>Fifth level</a:t>
             </a:r>
+            <a:endParaRPr lang="en-US"/>
           </a:p>
         </p:txBody>
       </p:sp>
@@ -1777,7 +1776,7 @@
           <a:p>
             <a:fld id="{5BCAD085-E8A6-8845-BD4E-CB4CCA059FC4}" type="datetimeFigureOut">
               <a:rPr lang="en-US" smtClean="0"/>
-              <a:t>4/18/2026</a:t>
+              <a:t>1/27/13</a:t>
             </a:fld>
             <a:endParaRPr lang="en-US"/>
           </a:p>
@@ -1871,9 +1870,10 @@
           <a:lstStyle/>
           <a:p>
             <a:r>
-              <a:rPr lang="en-US"/>
+              <a:rPr lang="en-US" smtClean="0"/>
               <a:t>Click to edit Master title style</a:t>
             </a:r>
+            <a:endParaRPr lang="en-US"/>
           </a:p>
         </p:txBody>
       </p:sp>
@@ -1894,7 +1894,7 @@
           <a:p>
             <a:fld id="{5BCAD085-E8A6-8845-BD4E-CB4CCA059FC4}" type="datetimeFigureOut">
               <a:rPr lang="en-US" smtClean="0"/>
-              <a:t>4/18/2026</a:t>
+              <a:t>1/27/13</a:t>
             </a:fld>
             <a:endParaRPr lang="en-US"/>
           </a:p>
@@ -1989,7 +1989,7 @@
           <a:p>
             <a:fld id="{5BCAD085-E8A6-8845-BD4E-CB4CCA059FC4}" type="datetimeFigureOut">
               <a:rPr lang="en-US" smtClean="0"/>
-              <a:t>4/18/2026</a:t>
+              <a:t>1/27/13</a:t>
             </a:fld>
             <a:endParaRPr lang="en-US"/>
           </a:p>
@@ -2092,9 +2092,10 @@
           </a:lstStyle>
           <a:p>
             <a:r>
-              <a:rPr lang="en-US"/>
+              <a:rPr lang="en-US" smtClean="0"/>
               <a:t>Click to edit Master title style</a:t>
             </a:r>
+            <a:endParaRPr lang="en-US"/>
           </a:p>
         </p:txBody>
       </p:sp>
@@ -2148,37 +2149,38 @@
           <a:p>
             <a:pPr lvl="0"/>
             <a:r>
-              <a:rPr lang="en-US"/>
+              <a:rPr lang="en-US" smtClean="0"/>
               <a:t>Click to edit Master text styles</a:t>
             </a:r>
           </a:p>
           <a:p>
             <a:pPr lvl="1"/>
             <a:r>
-              <a:rPr lang="en-US"/>
+              <a:rPr lang="en-US" smtClean="0"/>
               <a:t>Second level</a:t>
             </a:r>
           </a:p>
           <a:p>
             <a:pPr lvl="2"/>
             <a:r>
-              <a:rPr lang="en-US"/>
+              <a:rPr lang="en-US" smtClean="0"/>
               <a:t>Third level</a:t>
             </a:r>
           </a:p>
           <a:p>
             <a:pPr lvl="3"/>
             <a:r>
-              <a:rPr lang="en-US"/>
+              <a:rPr lang="en-US" smtClean="0"/>
               <a:t>Fourth level</a:t>
             </a:r>
           </a:p>
           <a:p>
             <a:pPr lvl="4"/>
             <a:r>
-              <a:rPr lang="en-US"/>
+              <a:rPr lang="en-US" smtClean="0"/>
               <a:t>Fifth level</a:t>
             </a:r>
+            <a:endParaRPr lang="en-US"/>
           </a:p>
         </p:txBody>
       </p:sp>
@@ -2241,7 +2243,7 @@
           <a:p>
             <a:pPr lvl="0"/>
             <a:r>
-              <a:rPr lang="en-US"/>
+              <a:rPr lang="en-US" smtClean="0"/>
               <a:t>Click to edit Master text styles</a:t>
             </a:r>
           </a:p>
@@ -2264,7 +2266,7 @@
           <a:p>
             <a:fld id="{5BCAD085-E8A6-8845-BD4E-CB4CCA059FC4}" type="datetimeFigureOut">
               <a:rPr lang="en-US" smtClean="0"/>
-              <a:t>4/18/2026</a:t>
+              <a:t>1/27/13</a:t>
             </a:fld>
             <a:endParaRPr lang="en-US"/>
           </a:p>
@@ -2367,9 +2369,10 @@
           </a:lstStyle>
           <a:p>
             <a:r>
-              <a:rPr lang="en-US"/>
+              <a:rPr lang="en-US" smtClean="0"/>
               <a:t>Click to edit Master title style</a:t>
             </a:r>
+            <a:endParaRPr lang="en-US"/>
           </a:p>
         </p:txBody>
       </p:sp>
@@ -2493,7 +2496,7 @@
           <a:p>
             <a:pPr lvl="0"/>
             <a:r>
-              <a:rPr lang="en-US"/>
+              <a:rPr lang="en-US" smtClean="0"/>
               <a:t>Click to edit Master text styles</a:t>
             </a:r>
           </a:p>
@@ -2516,7 +2519,7 @@
           <a:p>
             <a:fld id="{5BCAD085-E8A6-8845-BD4E-CB4CCA059FC4}" type="datetimeFigureOut">
               <a:rPr lang="en-US" smtClean="0"/>
-              <a:t>4/18/2026</a:t>
+              <a:t>1/27/13</a:t>
             </a:fld>
             <a:endParaRPr lang="en-US"/>
           </a:p>
@@ -2625,9 +2628,10 @@
           <a:lstStyle/>
           <a:p>
             <a:r>
-              <a:rPr lang="en-US"/>
+              <a:rPr lang="en-US" smtClean="0"/>
               <a:t>Click to edit Master title style</a:t>
             </a:r>
+            <a:endParaRPr lang="en-US"/>
           </a:p>
         </p:txBody>
       </p:sp>
@@ -2658,37 +2662,38 @@
           <a:p>
             <a:pPr lvl="0"/>
             <a:r>
-              <a:rPr lang="en-US"/>
+              <a:rPr lang="en-US" smtClean="0"/>
               <a:t>Click to edit Master text styles</a:t>
             </a:r>
           </a:p>
           <a:p>
             <a:pPr lvl="1"/>
             <a:r>
-              <a:rPr lang="en-US"/>
+              <a:rPr lang="en-US" smtClean="0"/>
               <a:t>Second level</a:t>
             </a:r>
           </a:p>
           <a:p>
             <a:pPr lvl="2"/>
             <a:r>
-              <a:rPr lang="en-US"/>
+              <a:rPr lang="en-US" smtClean="0"/>
               <a:t>Third level</a:t>
             </a:r>
           </a:p>
           <a:p>
             <a:pPr lvl="3"/>
             <a:r>
-              <a:rPr lang="en-US"/>
+              <a:rPr lang="en-US" smtClean="0"/>
               <a:t>Fourth level</a:t>
             </a:r>
           </a:p>
           <a:p>
             <a:pPr lvl="4"/>
             <a:r>
-              <a:rPr lang="en-US"/>
+              <a:rPr lang="en-US" smtClean="0"/>
               <a:t>Fifth level</a:t>
             </a:r>
+            <a:endParaRPr lang="en-US"/>
           </a:p>
         </p:txBody>
       </p:sp>
@@ -2727,7 +2732,7 @@
           <a:p>
             <a:fld id="{5BCAD085-E8A6-8845-BD4E-CB4CCA059FC4}" type="datetimeFigureOut">
               <a:rPr lang="en-US" smtClean="0"/>
-              <a:t>4/18/2026</a:t>
+              <a:t>1/27/13</a:t>
             </a:fld>
             <a:endParaRPr lang="en-US"/>
           </a:p>
@@ -3086,7 +3091,7 @@
 </file>
 
 <file path=ppt/slides/slide1.xml><?xml version="1.0" encoding="utf-8"?>
-<p:sld xmlns:a="http://schemas.openxmlformats.org/drawingml/2006/main" xmlns:r="http://schemas.openxmlformats.org/officeDocument/2006/relationships" xmlns:p="http://schemas.openxmlformats.org/presentationml/2006/main">
+<p:sld xmlns:a="http://schemas.openxmlformats.org/drawingml/2006/main" xmlns:p="http://schemas.openxmlformats.org/presentationml/2006/main" xmlns:r="http://schemas.openxmlformats.org/officeDocument/2006/relationships">
   <p:cSld>
     <p:spTree>
       <p:nvGrpSpPr>
@@ -3094,14 +3099,7 @@
         <p:cNvGrpSpPr/>
         <p:nvPr/>
       </p:nvGrpSpPr>
-      <p:grpSpPr>
-        <a:xfrm>
-          <a:off x="0" y="0"/>
-          <a:ext cx="0" cy="0"/>
-          <a:chOff x="0" y="0"/>
-          <a:chExt cx="0" cy="0"/>
-        </a:xfrm>
-      </p:grpSpPr>
+      <p:grpSpPr/>
       <p:sp>
         <p:nvSpPr>
           <p:cNvPr id="2" name="Rectangle 1"/>
@@ -3139,7 +3137,6 @@
           <a:lstStyle/>
           <a:p>
             <a:pPr algn="ctr"/>
-            <a:endParaRPr/>
           </a:p>
         </p:txBody>
       </p:sp>
@@ -3167,7 +3164,7 @@
           <a:p>
             <a:pPr algn="ctr"/>
             <a:r>
-              <a:rPr sz="2200" b="1" i="0" dirty="0">
+              <a:rPr sz="2200" b="1" i="0">
                 <a:solidFill>
                   <a:srgbClr val="1A73E8"/>
                 </a:solidFill>
@@ -3178,7 +3175,7 @@
           <a:p>
             <a:pPr algn="ctr"/>
             <a:r>
-              <a:rPr sz="2200" b="1" i="0" dirty="0">
+              <a:rPr sz="2200" b="1" i="0">
                 <a:solidFill>
                   <a:srgbClr val="1A73E8"/>
                 </a:solidFill>
@@ -3189,7 +3186,7 @@
           <a:p>
             <a:pPr algn="ctr"/>
             <a:r>
-              <a:rPr sz="2200" b="1" i="0" dirty="0">
+              <a:rPr sz="2200" b="1" i="0">
                 <a:solidFill>
                   <a:srgbClr val="1A73E8"/>
                 </a:solidFill>
@@ -3241,8 +3238,8 @@
         </p:nvSpPr>
         <p:spPr>
           <a:xfrm>
-            <a:off x="3780758" y="3474720"/>
-            <a:ext cx="1582484" cy="461665"/>
+            <a:off x="457200" y="3474720"/>
+            <a:ext cx="8229600" cy="731520"/>
           </a:xfrm>
           <a:prstGeom prst="rect">
             <a:avLst/>
@@ -3257,7 +3254,7 @@
           <a:p>
             <a:pPr algn="ctr"/>
             <a:r>
-              <a:rPr sz="1300" b="1" i="0" dirty="0">
+              <a:rPr sz="1300" b="1" i="0">
                 <a:solidFill>
                   <a:srgbClr val="202020"/>
                 </a:solidFill>
@@ -3268,12 +3265,23 @@
           <a:p>
             <a:pPr algn="ctr"/>
             <a:r>
-              <a:rPr sz="1100" b="0" i="0" dirty="0">
+              <a:rPr sz="1100" b="0" i="0">
                 <a:solidFill>
                   <a:srgbClr val="666666"/>
                 </a:solidFill>
               </a:rPr>
               <a:t>Magister Ilmu Komputer</a:t>
+            </a:r>
+          </a:p>
+          <a:p>
+            <a:pPr algn="ctr"/>
+            <a:r>
+              <a:rPr sz="1000" b="0" i="1">
+                <a:solidFill>
+                  <a:srgbClr val="666666"/>
+                </a:solidFill>
+              </a:rPr>
+              <a:t>Subset dari Tahap 4 Tesis — April 2026</a:t>
             </a:r>
           </a:p>
         </p:txBody>
@@ -3287,7 +3295,7 @@
 </file>
 
 <file path=ppt/slides/slide10.xml><?xml version="1.0" encoding="utf-8"?>
-<p:sld xmlns:a="http://schemas.openxmlformats.org/drawingml/2006/main" xmlns:r="http://schemas.openxmlformats.org/officeDocument/2006/relationships" xmlns:p="http://schemas.openxmlformats.org/presentationml/2006/main">
+<p:sld xmlns:a="http://schemas.openxmlformats.org/drawingml/2006/main" xmlns:p="http://schemas.openxmlformats.org/presentationml/2006/main" xmlns:r="http://schemas.openxmlformats.org/officeDocument/2006/relationships">
   <p:cSld>
     <p:spTree>
       <p:nvGrpSpPr>
@@ -3295,14 +3303,7 @@
         <p:cNvGrpSpPr/>
         <p:nvPr/>
       </p:nvGrpSpPr>
-      <p:grpSpPr>
-        <a:xfrm>
-          <a:off x="0" y="0"/>
-          <a:ext cx="0" cy="0"/>
-          <a:chOff x="0" y="0"/>
-          <a:chExt cx="0" cy="0"/>
-        </a:xfrm>
-      </p:grpSpPr>
+      <p:grpSpPr/>
       <p:sp>
         <p:nvSpPr>
           <p:cNvPr id="2" name="TextBox 1"/>
@@ -3354,48 +3355,12 @@
             <a:tbl>
               <a:tblPr firstRow="1" bandRow="1"/>
               <a:tblGrid>
-                <a:gridCol w="613954">
-                  <a:extLst>
-                    <a:ext uri="{9D8B030D-6E8A-4147-A177-3AD203B41FA5}">
-                      <a16:colId xmlns:a16="http://schemas.microsoft.com/office/drawing/2014/main" val="20000"/>
-                    </a:ext>
-                  </a:extLst>
-                </a:gridCol>
-                <a:gridCol w="2251165">
-                  <a:extLst>
-                    <a:ext uri="{9D8B030D-6E8A-4147-A177-3AD203B41FA5}">
-                      <a16:colId xmlns:a16="http://schemas.microsoft.com/office/drawing/2014/main" val="20001"/>
-                    </a:ext>
-                  </a:extLst>
-                </a:gridCol>
-                <a:gridCol w="1637211">
-                  <a:extLst>
-                    <a:ext uri="{9D8B030D-6E8A-4147-A177-3AD203B41FA5}">
-                      <a16:colId xmlns:a16="http://schemas.microsoft.com/office/drawing/2014/main" val="20002"/>
-                    </a:ext>
-                  </a:extLst>
-                </a:gridCol>
-                <a:gridCol w="1227908">
-                  <a:extLst>
-                    <a:ext uri="{9D8B030D-6E8A-4147-A177-3AD203B41FA5}">
-                      <a16:colId xmlns:a16="http://schemas.microsoft.com/office/drawing/2014/main" val="20003"/>
-                    </a:ext>
-                  </a:extLst>
-                </a:gridCol>
-                <a:gridCol w="1432560">
-                  <a:extLst>
-                    <a:ext uri="{9D8B030D-6E8A-4147-A177-3AD203B41FA5}">
-                      <a16:colId xmlns:a16="http://schemas.microsoft.com/office/drawing/2014/main" val="20004"/>
-                    </a:ext>
-                  </a:extLst>
-                </a:gridCol>
-                <a:gridCol w="1432560">
-                  <a:extLst>
-                    <a:ext uri="{9D8B030D-6E8A-4147-A177-3AD203B41FA5}">
-                      <a16:colId xmlns:a16="http://schemas.microsoft.com/office/drawing/2014/main" val="20005"/>
-                    </a:ext>
-                  </a:extLst>
-                </a:gridCol>
+                <a:gridCol w="613954"/>
+                <a:gridCol w="2251165"/>
+                <a:gridCol w="1637211"/>
+                <a:gridCol w="1227908"/>
+                <a:gridCol w="1432560"/>
+                <a:gridCol w="1432560"/>
               </a:tblGrid>
               <a:tr h="274320">
                 <a:tc>
@@ -3530,11 +3495,6 @@
                     </a:solidFill>
                   </a:tcPr>
                 </a:tc>
-                <a:extLst>
-                  <a:ext uri="{0D108BD9-81ED-4DB2-BD59-A6C34878D82A}">
-                    <a16:rowId xmlns:a16="http://schemas.microsoft.com/office/drawing/2014/main" val="10000"/>
-                  </a:ext>
-                </a:extLst>
               </a:tr>
               <a:tr h="274320">
                 <a:tc>
@@ -3669,11 +3629,6 @@
                     </a:solidFill>
                   </a:tcPr>
                 </a:tc>
-                <a:extLst>
-                  <a:ext uri="{0D108BD9-81ED-4DB2-BD59-A6C34878D82A}">
-                    <a16:rowId xmlns:a16="http://schemas.microsoft.com/office/drawing/2014/main" val="10001"/>
-                  </a:ext>
-                </a:extLst>
               </a:tr>
               <a:tr h="274320">
                 <a:tc>
@@ -3808,11 +3763,6 @@
                     </a:solidFill>
                   </a:tcPr>
                 </a:tc>
-                <a:extLst>
-                  <a:ext uri="{0D108BD9-81ED-4DB2-BD59-A6C34878D82A}">
-                    <a16:rowId xmlns:a16="http://schemas.microsoft.com/office/drawing/2014/main" val="10002"/>
-                  </a:ext>
-                </a:extLst>
               </a:tr>
               <a:tr h="274320">
                 <a:tc>
@@ -3947,11 +3897,6 @@
                     </a:solidFill>
                   </a:tcPr>
                 </a:tc>
-                <a:extLst>
-                  <a:ext uri="{0D108BD9-81ED-4DB2-BD59-A6C34878D82A}">
-                    <a16:rowId xmlns:a16="http://schemas.microsoft.com/office/drawing/2014/main" val="10003"/>
-                  </a:ext>
-                </a:extLst>
               </a:tr>
               <a:tr h="274320">
                 <a:tc>
@@ -4086,11 +4031,6 @@
                     </a:solidFill>
                   </a:tcPr>
                 </a:tc>
-                <a:extLst>
-                  <a:ext uri="{0D108BD9-81ED-4DB2-BD59-A6C34878D82A}">
-                    <a16:rowId xmlns:a16="http://schemas.microsoft.com/office/drawing/2014/main" val="10004"/>
-                  </a:ext>
-                </a:extLst>
               </a:tr>
               <a:tr h="274320">
                 <a:tc>
@@ -4225,11 +4165,6 @@
                     </a:solidFill>
                   </a:tcPr>
                 </a:tc>
-                <a:extLst>
-                  <a:ext uri="{0D108BD9-81ED-4DB2-BD59-A6C34878D82A}">
-                    <a16:rowId xmlns:a16="http://schemas.microsoft.com/office/drawing/2014/main" val="10005"/>
-                  </a:ext>
-                </a:extLst>
               </a:tr>
               <a:tr h="274320">
                 <a:tc>
@@ -4364,11 +4299,6 @@
                     </a:solidFill>
                   </a:tcPr>
                 </a:tc>
-                <a:extLst>
-                  <a:ext uri="{0D108BD9-81ED-4DB2-BD59-A6C34878D82A}">
-                    <a16:rowId xmlns:a16="http://schemas.microsoft.com/office/drawing/2014/main" val="10006"/>
-                  </a:ext>
-                </a:extLst>
               </a:tr>
               <a:tr h="274320">
                 <a:tc>
@@ -4503,11 +4433,6 @@
                     </a:solidFill>
                   </a:tcPr>
                 </a:tc>
-                <a:extLst>
-                  <a:ext uri="{0D108BD9-81ED-4DB2-BD59-A6C34878D82A}">
-                    <a16:rowId xmlns:a16="http://schemas.microsoft.com/office/drawing/2014/main" val="10007"/>
-                  </a:ext>
-                </a:extLst>
               </a:tr>
               <a:tr h="274320">
                 <a:tc>
@@ -4642,11 +4567,6 @@
                     </a:solidFill>
                   </a:tcPr>
                 </a:tc>
-                <a:extLst>
-                  <a:ext uri="{0D108BD9-81ED-4DB2-BD59-A6C34878D82A}">
-                    <a16:rowId xmlns:a16="http://schemas.microsoft.com/office/drawing/2014/main" val="10008"/>
-                  </a:ext>
-                </a:extLst>
               </a:tr>
               <a:tr h="274320">
                 <a:tc>
@@ -4781,11 +4701,6 @@
                     </a:solidFill>
                   </a:tcPr>
                 </a:tc>
-                <a:extLst>
-                  <a:ext uri="{0D108BD9-81ED-4DB2-BD59-A6C34878D82A}">
-                    <a16:rowId xmlns:a16="http://schemas.microsoft.com/office/drawing/2014/main" val="10009"/>
-                  </a:ext>
-                </a:extLst>
               </a:tr>
               <a:tr h="274320">
                 <a:tc>
@@ -4920,11 +4835,6 @@
                     </a:solidFill>
                   </a:tcPr>
                 </a:tc>
-                <a:extLst>
-                  <a:ext uri="{0D108BD9-81ED-4DB2-BD59-A6C34878D82A}">
-                    <a16:rowId xmlns:a16="http://schemas.microsoft.com/office/drawing/2014/main" val="10010"/>
-                  </a:ext>
-                </a:extLst>
               </a:tr>
             </a:tbl>
           </a:graphicData>
@@ -4986,7 +4896,7 @@
 </file>
 
 <file path=ppt/slides/slide11.xml><?xml version="1.0" encoding="utf-8"?>
-<p:sld xmlns:a="http://schemas.openxmlformats.org/drawingml/2006/main" xmlns:r="http://schemas.openxmlformats.org/officeDocument/2006/relationships" xmlns:p="http://schemas.openxmlformats.org/presentationml/2006/main">
+<p:sld xmlns:a="http://schemas.openxmlformats.org/drawingml/2006/main" xmlns:p="http://schemas.openxmlformats.org/presentationml/2006/main" xmlns:r="http://schemas.openxmlformats.org/officeDocument/2006/relationships">
   <p:cSld>
     <p:spTree>
       <p:nvGrpSpPr>
@@ -4994,14 +4904,7 @@
         <p:cNvGrpSpPr/>
         <p:nvPr/>
       </p:nvGrpSpPr>
-      <p:grpSpPr>
-        <a:xfrm>
-          <a:off x="0" y="0"/>
-          <a:ext cx="0" cy="0"/>
-          <a:chOff x="0" y="0"/>
-          <a:chExt cx="0" cy="0"/>
-        </a:xfrm>
-      </p:grpSpPr>
+      <p:grpSpPr/>
       <p:sp>
         <p:nvSpPr>
           <p:cNvPr id="2" name="TextBox 1"/>
@@ -5053,48 +4956,12 @@
             <a:tbl>
               <a:tblPr firstRow="1" bandRow="1"/>
               <a:tblGrid>
-                <a:gridCol w="1199352">
-                  <a:extLst>
-                    <a:ext uri="{9D8B030D-6E8A-4147-A177-3AD203B41FA5}">
-                      <a16:colId xmlns:a16="http://schemas.microsoft.com/office/drawing/2014/main" val="20000"/>
-                    </a:ext>
-                  </a:extLst>
-                </a:gridCol>
-                <a:gridCol w="1199352">
-                  <a:extLst>
-                    <a:ext uri="{9D8B030D-6E8A-4147-A177-3AD203B41FA5}">
-                      <a16:colId xmlns:a16="http://schemas.microsoft.com/office/drawing/2014/main" val="20001"/>
-                    </a:ext>
-                  </a:extLst>
-                </a:gridCol>
-                <a:gridCol w="1099406">
-                  <a:extLst>
-                    <a:ext uri="{9D8B030D-6E8A-4147-A177-3AD203B41FA5}">
-                      <a16:colId xmlns:a16="http://schemas.microsoft.com/office/drawing/2014/main" val="20002"/>
-                    </a:ext>
-                  </a:extLst>
-                </a:gridCol>
-                <a:gridCol w="1099406">
-                  <a:extLst>
-                    <a:ext uri="{9D8B030D-6E8A-4147-A177-3AD203B41FA5}">
-                      <a16:colId xmlns:a16="http://schemas.microsoft.com/office/drawing/2014/main" val="20003"/>
-                    </a:ext>
-                  </a:extLst>
-                </a:gridCol>
-                <a:gridCol w="999460">
-                  <a:extLst>
-                    <a:ext uri="{9D8B030D-6E8A-4147-A177-3AD203B41FA5}">
-                      <a16:colId xmlns:a16="http://schemas.microsoft.com/office/drawing/2014/main" val="20004"/>
-                    </a:ext>
-                  </a:extLst>
-                </a:gridCol>
-                <a:gridCol w="2998381">
-                  <a:extLst>
-                    <a:ext uri="{9D8B030D-6E8A-4147-A177-3AD203B41FA5}">
-                      <a16:colId xmlns:a16="http://schemas.microsoft.com/office/drawing/2014/main" val="20005"/>
-                    </a:ext>
-                  </a:extLst>
-                </a:gridCol>
+                <a:gridCol w="1199352"/>
+                <a:gridCol w="1199352"/>
+                <a:gridCol w="1099406"/>
+                <a:gridCol w="1099406"/>
+                <a:gridCol w="999460"/>
+                <a:gridCol w="2998381"/>
               </a:tblGrid>
               <a:tr h="292608">
                 <a:tc>
@@ -5229,11 +5096,6 @@
                     </a:solidFill>
                   </a:tcPr>
                 </a:tc>
-                <a:extLst>
-                  <a:ext uri="{0D108BD9-81ED-4DB2-BD59-A6C34878D82A}">
-                    <a16:rowId xmlns:a16="http://schemas.microsoft.com/office/drawing/2014/main" val="10000"/>
-                  </a:ext>
-                </a:extLst>
               </a:tr>
               <a:tr h="292608">
                 <a:tc>
@@ -5368,11 +5230,6 @@
                     </a:solidFill>
                   </a:tcPr>
                 </a:tc>
-                <a:extLst>
-                  <a:ext uri="{0D108BD9-81ED-4DB2-BD59-A6C34878D82A}">
-                    <a16:rowId xmlns:a16="http://schemas.microsoft.com/office/drawing/2014/main" val="10001"/>
-                  </a:ext>
-                </a:extLst>
               </a:tr>
               <a:tr h="292608">
                 <a:tc>
@@ -5507,11 +5364,6 @@
                     </a:solidFill>
                   </a:tcPr>
                 </a:tc>
-                <a:extLst>
-                  <a:ext uri="{0D108BD9-81ED-4DB2-BD59-A6C34878D82A}">
-                    <a16:rowId xmlns:a16="http://schemas.microsoft.com/office/drawing/2014/main" val="10002"/>
-                  </a:ext>
-                </a:extLst>
               </a:tr>
               <a:tr h="292608">
                 <a:tc>
@@ -5646,11 +5498,6 @@
                     </a:solidFill>
                   </a:tcPr>
                 </a:tc>
-                <a:extLst>
-                  <a:ext uri="{0D108BD9-81ED-4DB2-BD59-A6C34878D82A}">
-                    <a16:rowId xmlns:a16="http://schemas.microsoft.com/office/drawing/2014/main" val="10003"/>
-                  </a:ext>
-                </a:extLst>
               </a:tr>
               <a:tr h="292608">
                 <a:tc>
@@ -5785,11 +5632,6 @@
                     </a:solidFill>
                   </a:tcPr>
                 </a:tc>
-                <a:extLst>
-                  <a:ext uri="{0D108BD9-81ED-4DB2-BD59-A6C34878D82A}">
-                    <a16:rowId xmlns:a16="http://schemas.microsoft.com/office/drawing/2014/main" val="10004"/>
-                  </a:ext>
-                </a:extLst>
               </a:tr>
             </a:tbl>
           </a:graphicData>
@@ -5831,11 +5673,10 @@
           </a:p>
           <a:p>
             <a:pPr algn="l"/>
-            <a:endParaRPr sz="1100" b="1" i="0">
-              <a:solidFill>
-                <a:srgbClr val="202020"/>
-              </a:solidFill>
-            </a:endParaRPr>
+            <a:r>
+              <a:rPr sz="300" b="0" i="0"/>
+              <a:t/>
+            </a:r>
           </a:p>
           <a:p>
             <a:pPr algn="l"/>
@@ -5903,7 +5744,7 @@
 </file>
 
 <file path=ppt/slides/slide12.xml><?xml version="1.0" encoding="utf-8"?>
-<p:sld xmlns:a="http://schemas.openxmlformats.org/drawingml/2006/main" xmlns:r="http://schemas.openxmlformats.org/officeDocument/2006/relationships" xmlns:p="http://schemas.openxmlformats.org/presentationml/2006/main">
+<p:sld xmlns:a="http://schemas.openxmlformats.org/drawingml/2006/main" xmlns:p="http://schemas.openxmlformats.org/presentationml/2006/main" xmlns:r="http://schemas.openxmlformats.org/officeDocument/2006/relationships">
   <p:cSld>
     <p:spTree>
       <p:nvGrpSpPr>
@@ -5911,14 +5752,7 @@
         <p:cNvGrpSpPr/>
         <p:nvPr/>
       </p:nvGrpSpPr>
-      <p:grpSpPr>
-        <a:xfrm>
-          <a:off x="0" y="0"/>
-          <a:ext cx="0" cy="0"/>
-          <a:chOff x="0" y="0"/>
-          <a:chExt cx="0" cy="0"/>
-        </a:xfrm>
-      </p:grpSpPr>
+      <p:grpSpPr/>
       <p:sp>
         <p:nvSpPr>
           <p:cNvPr id="2" name="TextBox 1"/>
@@ -5989,11 +5823,10 @@
           </a:p>
           <a:p>
             <a:pPr algn="l"/>
-            <a:endParaRPr sz="1100" b="1" i="0">
-              <a:solidFill>
-                <a:srgbClr val="1A73E8"/>
-              </a:solidFill>
-            </a:endParaRPr>
+            <a:r>
+              <a:rPr sz="200" b="0" i="0"/>
+              <a:t/>
+            </a:r>
           </a:p>
           <a:p>
             <a:pPr algn="l"/>
@@ -6055,11 +5888,10 @@
           </a:p>
           <a:p>
             <a:pPr algn="l"/>
-            <a:endParaRPr sz="1100" b="1" i="0">
-              <a:solidFill>
-                <a:srgbClr val="0F9D58"/>
-              </a:solidFill>
-            </a:endParaRPr>
+            <a:r>
+              <a:rPr sz="200" b="0" i="0"/>
+              <a:t/>
+            </a:r>
           </a:p>
           <a:p>
             <a:pPr algn="l"/>
@@ -6121,11 +5953,10 @@
           </a:p>
           <a:p>
             <a:pPr algn="l"/>
-            <a:endParaRPr sz="1100" b="1" i="0">
-              <a:solidFill>
-                <a:srgbClr val="202020"/>
-              </a:solidFill>
-            </a:endParaRPr>
+            <a:r>
+              <a:rPr sz="200" b="0" i="0"/>
+              <a:t/>
+            </a:r>
           </a:p>
           <a:p>
             <a:pPr algn="l"/>
@@ -6160,7 +5991,7 @@
 </file>
 
 <file path=ppt/slides/slide13.xml><?xml version="1.0" encoding="utf-8"?>
-<p:sld xmlns:a="http://schemas.openxmlformats.org/drawingml/2006/main" xmlns:r="http://schemas.openxmlformats.org/officeDocument/2006/relationships" xmlns:p="http://schemas.openxmlformats.org/presentationml/2006/main">
+<p:sld xmlns:a="http://schemas.openxmlformats.org/drawingml/2006/main" xmlns:p="http://schemas.openxmlformats.org/presentationml/2006/main" xmlns:r="http://schemas.openxmlformats.org/officeDocument/2006/relationships">
   <p:cSld>
     <p:spTree>
       <p:nvGrpSpPr>
@@ -6168,14 +5999,7 @@
         <p:cNvGrpSpPr/>
         <p:nvPr/>
       </p:nvGrpSpPr>
-      <p:grpSpPr>
-        <a:xfrm>
-          <a:off x="0" y="0"/>
-          <a:ext cx="0" cy="0"/>
-          <a:chOff x="0" y="0"/>
-          <a:chExt cx="0" cy="0"/>
-        </a:xfrm>
-      </p:grpSpPr>
+      <p:grpSpPr/>
       <p:sp>
         <p:nvSpPr>
           <p:cNvPr id="2" name="TextBox 1"/>
@@ -6246,11 +6070,10 @@
           </a:p>
           <a:p>
             <a:pPr algn="l"/>
-            <a:endParaRPr sz="1200" b="1" i="0">
-              <a:solidFill>
-                <a:srgbClr val="0F9D58"/>
-              </a:solidFill>
-            </a:endParaRPr>
+            <a:r>
+              <a:rPr sz="300" b="0" i="0"/>
+              <a:t/>
+            </a:r>
           </a:p>
           <a:p>
             <a:pPr algn="l"/>
@@ -6334,11 +6157,10 @@
           </a:p>
           <a:p>
             <a:pPr algn="l"/>
-            <a:endParaRPr sz="1200" b="1" i="0">
-              <a:solidFill>
-                <a:srgbClr val="202020"/>
-              </a:solidFill>
-            </a:endParaRPr>
+            <a:r>
+              <a:rPr sz="300" b="0" i="0"/>
+              <a:t/>
+            </a:r>
           </a:p>
           <a:p>
             <a:pPr algn="l"/>
@@ -6395,7 +6217,7 @@
 </file>
 
 <file path=ppt/slides/slide2.xml><?xml version="1.0" encoding="utf-8"?>
-<p:sld xmlns:a="http://schemas.openxmlformats.org/drawingml/2006/main" xmlns:r="http://schemas.openxmlformats.org/officeDocument/2006/relationships" xmlns:p="http://schemas.openxmlformats.org/presentationml/2006/main">
+<p:sld xmlns:a="http://schemas.openxmlformats.org/drawingml/2006/main" xmlns:p="http://schemas.openxmlformats.org/presentationml/2006/main" xmlns:r="http://schemas.openxmlformats.org/officeDocument/2006/relationships">
   <p:cSld>
     <p:spTree>
       <p:nvGrpSpPr>
@@ -6403,14 +6225,7 @@
         <p:cNvGrpSpPr/>
         <p:nvPr/>
       </p:nvGrpSpPr>
-      <p:grpSpPr>
-        <a:xfrm>
-          <a:off x="0" y="0"/>
-          <a:ext cx="0" cy="0"/>
-          <a:chOff x="0" y="0"/>
-          <a:chExt cx="0" cy="0"/>
-        </a:xfrm>
-      </p:grpSpPr>
+      <p:grpSpPr/>
       <p:sp>
         <p:nvSpPr>
           <p:cNvPr id="2" name="TextBox 1"/>
@@ -6497,7 +6312,15 @@
                   <a:srgbClr val="666666"/>
                 </a:solidFill>
               </a:rPr>
-              <a:t>= judul sub bab   |   •  </a:t>
+              <a:t>= judul sub bab   |   </a:t>
+            </a:r>
+            <a:r>
+              <a:rPr sz="900">
+                <a:solidFill>
+                  <a:srgbClr val="666666"/>
+                </a:solidFill>
+              </a:rPr>
+              <a:t>•  </a:t>
             </a:r>
             <a:r>
               <a:rPr sz="900" i="1">
@@ -6540,6 +6363,14 @@
               </a:rPr>
               <a:t>Abstract  </a:t>
             </a:r>
+            <a:r>
+              <a:rPr sz="1150" b="1">
+                <a:solidFill>
+                  <a:srgbClr val="1A73E8"/>
+                </a:solidFill>
+              </a:rPr>
+              <a:t/>
+            </a:r>
           </a:p>
           <a:p>
             <a:r>
@@ -6558,7 +6389,7 @@
                   <a:srgbClr val="666666"/>
                 </a:solidFill>
               </a:rPr>
-              <a:t>        •  Method: 4 arsitektur × fusion × transfer learning</a:t>
+              <a:t>        •  Method: 5 arsitektur (CNN/FCNN/Early/Intermediate/Late) × TL</a:t>
             </a:r>
           </a:p>
           <a:p>
@@ -6592,11 +6423,10 @@
             </a:r>
           </a:p>
           <a:p>
-            <a:endParaRPr sz="850">
-              <a:solidFill>
-                <a:srgbClr val="666666"/>
-              </a:solidFill>
-            </a:endParaRPr>
+            <a:r>
+              <a:rPr sz="400"/>
+              <a:t/>
+            </a:r>
           </a:p>
           <a:p>
             <a:r>
@@ -6605,7 +6435,15 @@
                   <a:srgbClr val="1A73E8"/>
                 </a:solidFill>
               </a:rPr>
-              <a:t>1.  Introduction</a:t>
+              <a:t>1.  </a:t>
+            </a:r>
+            <a:r>
+              <a:rPr sz="1150" b="1">
+                <a:solidFill>
+                  <a:srgbClr val="1A73E8"/>
+                </a:solidFill>
+              </a:rPr>
+              <a:t>Introduction</a:t>
             </a:r>
           </a:p>
           <a:p>
@@ -6688,7 +6526,15 @@
                   <a:srgbClr val="1A73E8"/>
                 </a:solidFill>
               </a:rPr>
-              <a:t>2.  Related Work</a:t>
+              <a:t>2.  </a:t>
+            </a:r>
+            <a:r>
+              <a:rPr sz="1150" b="1">
+                <a:solidFill>
+                  <a:srgbClr val="1A73E8"/>
+                </a:solidFill>
+              </a:rPr>
+              <a:t>Related Work</a:t>
             </a:r>
           </a:p>
           <a:p>
@@ -6764,11 +6610,10 @@
             </a:r>
           </a:p>
           <a:p>
-            <a:endParaRPr sz="1000" b="1" i="1">
-              <a:solidFill>
-                <a:srgbClr val="202020"/>
-              </a:solidFill>
-            </a:endParaRPr>
+            <a:r>
+              <a:rPr sz="400"/>
+              <a:t/>
+            </a:r>
           </a:p>
           <a:p>
             <a:r>
@@ -6777,7 +6622,15 @@
                   <a:srgbClr val="1A73E8"/>
                 </a:solidFill>
               </a:rPr>
-              <a:t>3.  Proposed Method</a:t>
+              <a:t>3.  </a:t>
+            </a:r>
+            <a:r>
+              <a:rPr sz="1150" b="1">
+                <a:solidFill>
+                  <a:srgbClr val="1A73E8"/>
+                </a:solidFill>
+              </a:rPr>
+              <a:t>Proposed Method</a:t>
             </a:r>
           </a:p>
           <a:p>
@@ -6907,7 +6760,7 @@
 </file>
 
 <file path=ppt/slides/slide3.xml><?xml version="1.0" encoding="utf-8"?>
-<p:sld xmlns:a="http://schemas.openxmlformats.org/drawingml/2006/main" xmlns:r="http://schemas.openxmlformats.org/officeDocument/2006/relationships" xmlns:p="http://schemas.openxmlformats.org/presentationml/2006/main">
+<p:sld xmlns:a="http://schemas.openxmlformats.org/drawingml/2006/main" xmlns:p="http://schemas.openxmlformats.org/presentationml/2006/main" xmlns:r="http://schemas.openxmlformats.org/officeDocument/2006/relationships">
   <p:cSld>
     <p:spTree>
       <p:nvGrpSpPr>
@@ -6915,14 +6768,7 @@
         <p:cNvGrpSpPr/>
         <p:nvPr/>
       </p:nvGrpSpPr>
-      <p:grpSpPr>
-        <a:xfrm>
-          <a:off x="0" y="0"/>
-          <a:ext cx="0" cy="0"/>
-          <a:chOff x="0" y="0"/>
-          <a:chExt cx="0" cy="0"/>
-        </a:xfrm>
-      </p:grpSpPr>
+      <p:grpSpPr/>
       <p:sp>
         <p:nvSpPr>
           <p:cNvPr id="2" name="TextBox 1"/>
@@ -6985,7 +6831,15 @@
                   <a:srgbClr val="1A73E8"/>
                 </a:solidFill>
               </a:rPr>
-              <a:t>3.  Proposed Method (lanjutan)</a:t>
+              <a:t>3.  </a:t>
+            </a:r>
+            <a:r>
+              <a:rPr sz="1150" b="1">
+                <a:solidFill>
+                  <a:srgbClr val="1A73E8"/>
+                </a:solidFill>
+              </a:rPr>
+              <a:t>Proposed Method (lanjutan)</a:t>
             </a:r>
           </a:p>
           <a:p>
@@ -7075,11 +6929,10 @@
             </a:r>
           </a:p>
           <a:p>
-            <a:endParaRPr sz="850">
-              <a:solidFill>
-                <a:srgbClr val="666666"/>
-              </a:solidFill>
-            </a:endParaRPr>
+            <a:r>
+              <a:rPr sz="400"/>
+              <a:t/>
+            </a:r>
           </a:p>
           <a:p>
             <a:r>
@@ -7088,7 +6941,15 @@
                   <a:srgbClr val="1A73E8"/>
                 </a:solidFill>
               </a:rPr>
-              <a:t>4.  Experimental Results</a:t>
+              <a:t>4.  </a:t>
+            </a:r>
+            <a:r>
+              <a:rPr sz="1150" b="1">
+                <a:solidFill>
+                  <a:srgbClr val="1A73E8"/>
+                </a:solidFill>
+              </a:rPr>
+              <a:t>Experimental Results</a:t>
             </a:r>
           </a:p>
           <a:p>
@@ -7192,7 +7053,7 @@
         <p:spPr>
           <a:xfrm>
             <a:off x="4663440" y="777240"/>
-            <a:ext cx="4206240" cy="2593018"/>
+            <a:ext cx="4206240" cy="4114800"/>
           </a:xfrm>
           <a:prstGeom prst="rect">
             <a:avLst/>
@@ -7206,17 +7067,25 @@
           <a:lstStyle/>
           <a:p>
             <a:r>
-              <a:rPr sz="1150" b="1" dirty="0">
+              <a:rPr sz="1150" b="1">
                 <a:solidFill>
                   <a:srgbClr val="1A73E8"/>
                 </a:solidFill>
               </a:rPr>
-              <a:t>5.  Discussion</a:t>
-            </a:r>
-          </a:p>
-          <a:p>
-            <a:r>
-              <a:rPr sz="1000" b="1" dirty="0">
+              <a:t>5.  </a:t>
+            </a:r>
+            <a:r>
+              <a:rPr sz="1150" b="1">
+                <a:solidFill>
+                  <a:srgbClr val="1A73E8"/>
+                </a:solidFill>
+              </a:rPr>
+              <a:t>Discussion</a:t>
+            </a:r>
+          </a:p>
+          <a:p>
+            <a:r>
+              <a:rPr sz="1000" b="1">
                 <a:solidFill>
                   <a:srgbClr val="202020"/>
                 </a:solidFill>
@@ -7224,7 +7093,7 @@
               <a:t>    5.1  </a:t>
             </a:r>
             <a:r>
-              <a:rPr sz="1000" b="1" i="1" dirty="0">
+              <a:rPr sz="1000" b="1" i="1">
                 <a:solidFill>
                   <a:srgbClr val="202020"/>
                 </a:solidFill>
@@ -7234,386 +7103,192 @@
           </a:p>
           <a:p>
             <a:r>
-              <a:rPr sz="850" dirty="0">
+              <a:rPr sz="850">
                 <a:solidFill>
                   <a:srgbClr val="666666"/>
                 </a:solidFill>
               </a:rPr>
-              <a:t>        •  </a:t>
-            </a:r>
-            <a:r>
-              <a:rPr sz="850" dirty="0" err="1">
+              <a:t>        •  Menjawab RQ1 (fusi image+landmark vs single)</a:t>
+            </a:r>
+          </a:p>
+          <a:p>
+            <a:r>
+              <a:rPr sz="1000" b="1">
+                <a:solidFill>
+                  <a:srgbClr val="202020"/>
+                </a:solidFill>
+              </a:rPr>
+              <a:t>    5.2  </a:t>
+            </a:r>
+            <a:r>
+              <a:rPr sz="1000" b="1" i="1">
+                <a:solidFill>
+                  <a:srgbClr val="202020"/>
+                </a:solidFill>
+              </a:rPr>
+              <a:t>Fusion Strategy Comparison: Intermediate vs Late</a:t>
+            </a:r>
+          </a:p>
+          <a:p>
+            <a:r>
+              <a:rPr sz="850">
                 <a:solidFill>
                   <a:srgbClr val="666666"/>
                 </a:solidFill>
               </a:rPr>
-              <a:t>Menjawab</a:t>
-            </a:r>
-            <a:r>
-              <a:rPr sz="850" dirty="0">
+              <a:t>        •  Menjawab RQ2 (strategi fusion terbaik)</a:t>
+            </a:r>
+          </a:p>
+          <a:p>
+            <a:r>
+              <a:rPr sz="1000" b="1">
+                <a:solidFill>
+                  <a:srgbClr val="202020"/>
+                </a:solidFill>
+              </a:rPr>
+              <a:t>    5.3  </a:t>
+            </a:r>
+            <a:r>
+              <a:rPr sz="1000" b="1" i="1">
+                <a:solidFill>
+                  <a:srgbClr val="202020"/>
+                </a:solidFill>
+              </a:rPr>
+              <a:t>Transfer Learning Effectiveness</a:t>
+            </a:r>
+          </a:p>
+          <a:p>
+            <a:r>
+              <a:rPr sz="850">
                 <a:solidFill>
                   <a:srgbClr val="666666"/>
                 </a:solidFill>
               </a:rPr>
-              <a:t> RQ1 (</a:t>
-            </a:r>
-            <a:r>
-              <a:rPr sz="850" dirty="0" err="1">
+              <a:t>        •  Menjawab RQ3 (gain TL pada data natural)</a:t>
+            </a:r>
+          </a:p>
+          <a:p>
+            <a:r>
+              <a:rPr sz="1000" b="1">
+                <a:solidFill>
+                  <a:srgbClr val="202020"/>
+                </a:solidFill>
+              </a:rPr>
+              <a:t>    5.4  </a:t>
+            </a:r>
+            <a:r>
+              <a:rPr sz="1000" b="1" i="1">
+                <a:solidFill>
+                  <a:srgbClr val="202020"/>
+                </a:solidFill>
+              </a:rPr>
+              <a:t>Limitations</a:t>
+            </a:r>
+          </a:p>
+          <a:p>
+            <a:r>
+              <a:rPr sz="850">
                 <a:solidFill>
                   <a:srgbClr val="666666"/>
                 </a:solidFill>
               </a:rPr>
-              <a:t>fusi</a:t>
-            </a:r>
-            <a:r>
-              <a:rPr sz="850" dirty="0">
+              <a:t>        •  Minority class langka, 37 subjek, label noise</a:t>
+            </a:r>
+          </a:p>
+          <a:p>
+            <a:r>
+              <a:rPr sz="1000" b="1">
+                <a:solidFill>
+                  <a:srgbClr val="202020"/>
+                </a:solidFill>
+              </a:rPr>
+              <a:t>    5.5  </a:t>
+            </a:r>
+            <a:r>
+              <a:rPr sz="1000" b="1" i="1">
+                <a:solidFill>
+                  <a:srgbClr val="202020"/>
+                </a:solidFill>
+              </a:rPr>
+              <a:t>Implications for Learning Analytics</a:t>
+            </a:r>
+          </a:p>
+          <a:p>
+            <a:r>
+              <a:rPr sz="400"/>
+              <a:t/>
+            </a:r>
+          </a:p>
+          <a:p>
+            <a:r>
+              <a:rPr sz="1150" b="1">
+                <a:solidFill>
+                  <a:srgbClr val="1A73E8"/>
+                </a:solidFill>
+              </a:rPr>
+              <a:t>6.  </a:t>
+            </a:r>
+            <a:r>
+              <a:rPr sz="1150" b="1">
+                <a:solidFill>
+                  <a:srgbClr val="1A73E8"/>
+                </a:solidFill>
+              </a:rPr>
+              <a:t>Conclusion</a:t>
+            </a:r>
+          </a:p>
+          <a:p>
+            <a:r>
+              <a:rPr sz="850">
                 <a:solidFill>
                   <a:srgbClr val="666666"/>
                 </a:solidFill>
               </a:rPr>
-              <a:t> </a:t>
-            </a:r>
-            <a:r>
-              <a:rPr sz="850" dirty="0" err="1">
+              <a:t>        •  Ringkasan 3 kontribusi &amp; best result</a:t>
+            </a:r>
+          </a:p>
+          <a:p>
+            <a:r>
+              <a:rPr sz="850">
                 <a:solidFill>
                   <a:srgbClr val="666666"/>
                 </a:solidFill>
               </a:rPr>
-              <a:t>image+landmark</a:t>
-            </a:r>
-            <a:r>
-              <a:rPr sz="850" dirty="0">
+              <a:t>        •  Future work: lebih banyak user, anotasi manual, real-time</a:t>
+            </a:r>
+          </a:p>
+          <a:p>
+            <a:r>
+              <a:rPr sz="400"/>
+              <a:t/>
+            </a:r>
+          </a:p>
+          <a:p>
+            <a:r>
+              <a:rPr sz="1150" b="1">
+                <a:solidFill>
+                  <a:srgbClr val="1A73E8"/>
+                </a:solidFill>
+              </a:rPr>
+              <a:t>  </a:t>
+            </a:r>
+            <a:r>
+              <a:rPr sz="1150" b="1">
+                <a:solidFill>
+                  <a:srgbClr val="1A73E8"/>
+                </a:solidFill>
+              </a:rPr>
+              <a:t>References</a:t>
+            </a:r>
+          </a:p>
+          <a:p>
+            <a:r>
+              <a:rPr sz="850">
                 <a:solidFill>
                   <a:srgbClr val="666666"/>
                 </a:solidFill>
               </a:rPr>
-              <a:t> vs single)</a:t>
-            </a:r>
-          </a:p>
-          <a:p>
-            <a:r>
-              <a:rPr sz="1000" b="1" dirty="0">
-                <a:solidFill>
-                  <a:srgbClr val="202020"/>
-                </a:solidFill>
-              </a:rPr>
-              <a:t>    5.2  </a:t>
-            </a:r>
-            <a:r>
-              <a:rPr sz="1000" b="1" i="1" dirty="0">
-                <a:solidFill>
-                  <a:srgbClr val="202020"/>
-                </a:solidFill>
-              </a:rPr>
-              <a:t>Fusion Strategy Comparison: Intermediate vs Late</a:t>
-            </a:r>
-          </a:p>
-          <a:p>
-            <a:r>
-              <a:rPr sz="850" dirty="0">
-                <a:solidFill>
-                  <a:srgbClr val="666666"/>
-                </a:solidFill>
-              </a:rPr>
-              <a:t>        •  </a:t>
-            </a:r>
-            <a:r>
-              <a:rPr sz="850" dirty="0" err="1">
-                <a:solidFill>
-                  <a:srgbClr val="666666"/>
-                </a:solidFill>
-              </a:rPr>
-              <a:t>Menjawab</a:t>
-            </a:r>
-            <a:r>
-              <a:rPr sz="850" dirty="0">
-                <a:solidFill>
-                  <a:srgbClr val="666666"/>
-                </a:solidFill>
-              </a:rPr>
-              <a:t> RQ2 (strategi fusion </a:t>
-            </a:r>
-            <a:r>
-              <a:rPr sz="850" dirty="0" err="1">
-                <a:solidFill>
-                  <a:srgbClr val="666666"/>
-                </a:solidFill>
-              </a:rPr>
-              <a:t>terbaik</a:t>
-            </a:r>
-            <a:r>
-              <a:rPr sz="850" dirty="0">
-                <a:solidFill>
-                  <a:srgbClr val="666666"/>
-                </a:solidFill>
-              </a:rPr>
-              <a:t>)</a:t>
-            </a:r>
-          </a:p>
-          <a:p>
-            <a:r>
-              <a:rPr sz="1000" b="1" dirty="0">
-                <a:solidFill>
-                  <a:srgbClr val="202020"/>
-                </a:solidFill>
-              </a:rPr>
-              <a:t>    5.3  </a:t>
-            </a:r>
-            <a:r>
-              <a:rPr sz="1000" b="1" i="1" dirty="0">
-                <a:solidFill>
-                  <a:srgbClr val="202020"/>
-                </a:solidFill>
-              </a:rPr>
-              <a:t>Transfer Learning Effectiveness</a:t>
-            </a:r>
-          </a:p>
-          <a:p>
-            <a:r>
-              <a:rPr sz="850" dirty="0">
-                <a:solidFill>
-                  <a:srgbClr val="666666"/>
-                </a:solidFill>
-              </a:rPr>
-              <a:t>        •  </a:t>
-            </a:r>
-            <a:r>
-              <a:rPr sz="850" dirty="0" err="1">
-                <a:solidFill>
-                  <a:srgbClr val="666666"/>
-                </a:solidFill>
-              </a:rPr>
-              <a:t>Menjawab</a:t>
-            </a:r>
-            <a:r>
-              <a:rPr sz="850" dirty="0">
-                <a:solidFill>
-                  <a:srgbClr val="666666"/>
-                </a:solidFill>
-              </a:rPr>
-              <a:t> RQ3 (gain TL pada data natural)</a:t>
-            </a:r>
-          </a:p>
-          <a:p>
-            <a:r>
-              <a:rPr sz="1000" b="1" dirty="0">
-                <a:solidFill>
-                  <a:srgbClr val="202020"/>
-                </a:solidFill>
-              </a:rPr>
-              <a:t>    5.4  </a:t>
-            </a:r>
-            <a:r>
-              <a:rPr sz="1000" b="1" i="1" dirty="0">
-                <a:solidFill>
-                  <a:srgbClr val="202020"/>
-                </a:solidFill>
-              </a:rPr>
-              <a:t>Limitations</a:t>
-            </a:r>
-          </a:p>
-          <a:p>
-            <a:r>
-              <a:rPr sz="850" dirty="0">
-                <a:solidFill>
-                  <a:srgbClr val="666666"/>
-                </a:solidFill>
-              </a:rPr>
-              <a:t>        •  Minority class </a:t>
-            </a:r>
-            <a:r>
-              <a:rPr sz="850" dirty="0" err="1">
-                <a:solidFill>
-                  <a:srgbClr val="666666"/>
-                </a:solidFill>
-              </a:rPr>
-              <a:t>langka</a:t>
-            </a:r>
-            <a:r>
-              <a:rPr sz="850" dirty="0">
-                <a:solidFill>
-                  <a:srgbClr val="666666"/>
-                </a:solidFill>
-              </a:rPr>
-              <a:t>, 37 </a:t>
-            </a:r>
-            <a:r>
-              <a:rPr sz="850" dirty="0" err="1">
-                <a:solidFill>
-                  <a:srgbClr val="666666"/>
-                </a:solidFill>
-              </a:rPr>
-              <a:t>subjek</a:t>
-            </a:r>
-            <a:r>
-              <a:rPr sz="850" dirty="0">
-                <a:solidFill>
-                  <a:srgbClr val="666666"/>
-                </a:solidFill>
-              </a:rPr>
-              <a:t>, label noise</a:t>
-            </a:r>
-          </a:p>
-          <a:p>
-            <a:r>
-              <a:rPr sz="1000" b="1" dirty="0">
-                <a:solidFill>
-                  <a:srgbClr val="202020"/>
-                </a:solidFill>
-              </a:rPr>
-              <a:t>    5.5  </a:t>
-            </a:r>
-            <a:r>
-              <a:rPr sz="1000" b="1" i="1" dirty="0">
-                <a:solidFill>
-                  <a:srgbClr val="202020"/>
-                </a:solidFill>
-              </a:rPr>
-              <a:t>Implications for Learning Analytics</a:t>
-            </a:r>
-          </a:p>
-          <a:p>
-            <a:endParaRPr sz="1000" b="1" i="1" dirty="0">
-              <a:solidFill>
-                <a:srgbClr val="202020"/>
-              </a:solidFill>
-            </a:endParaRPr>
-          </a:p>
-          <a:p>
-            <a:r>
-              <a:rPr sz="1150" b="1" dirty="0">
-                <a:solidFill>
-                  <a:srgbClr val="1A73E8"/>
-                </a:solidFill>
-              </a:rPr>
-              <a:t>6.  Conclusion</a:t>
-            </a:r>
-          </a:p>
-          <a:p>
-            <a:r>
-              <a:rPr sz="850" dirty="0">
-                <a:solidFill>
-                  <a:srgbClr val="666666"/>
-                </a:solidFill>
-              </a:rPr>
-              <a:t>        •  </a:t>
-            </a:r>
-            <a:r>
-              <a:rPr sz="850" dirty="0" err="1">
-                <a:solidFill>
-                  <a:srgbClr val="666666"/>
-                </a:solidFill>
-              </a:rPr>
-              <a:t>Ringkasan</a:t>
-            </a:r>
-            <a:r>
-              <a:rPr sz="850" dirty="0">
-                <a:solidFill>
-                  <a:srgbClr val="666666"/>
-                </a:solidFill>
-              </a:rPr>
-              <a:t> 3 </a:t>
-            </a:r>
-            <a:r>
-              <a:rPr sz="850" dirty="0" err="1">
-                <a:solidFill>
-                  <a:srgbClr val="666666"/>
-                </a:solidFill>
-              </a:rPr>
-              <a:t>kontribusi</a:t>
-            </a:r>
-            <a:r>
-              <a:rPr sz="850" dirty="0">
-                <a:solidFill>
-                  <a:srgbClr val="666666"/>
-                </a:solidFill>
-              </a:rPr>
-              <a:t> &amp; best result</a:t>
-            </a:r>
-          </a:p>
-          <a:p>
-            <a:r>
-              <a:rPr sz="850" dirty="0">
-                <a:solidFill>
-                  <a:srgbClr val="666666"/>
-                </a:solidFill>
-              </a:rPr>
-              <a:t>        •  Future work: </a:t>
-            </a:r>
-            <a:r>
-              <a:rPr sz="850" dirty="0" err="1">
-                <a:solidFill>
-                  <a:srgbClr val="666666"/>
-                </a:solidFill>
-              </a:rPr>
-              <a:t>lebih</a:t>
-            </a:r>
-            <a:r>
-              <a:rPr sz="850" dirty="0">
-                <a:solidFill>
-                  <a:srgbClr val="666666"/>
-                </a:solidFill>
-              </a:rPr>
-              <a:t> </a:t>
-            </a:r>
-            <a:r>
-              <a:rPr sz="850" dirty="0" err="1">
-                <a:solidFill>
-                  <a:srgbClr val="666666"/>
-                </a:solidFill>
-              </a:rPr>
-              <a:t>banyak</a:t>
-            </a:r>
-            <a:r>
-              <a:rPr sz="850" dirty="0">
-                <a:solidFill>
-                  <a:srgbClr val="666666"/>
-                </a:solidFill>
-              </a:rPr>
-              <a:t> user, </a:t>
-            </a:r>
-            <a:r>
-              <a:rPr sz="850" dirty="0" err="1">
-                <a:solidFill>
-                  <a:srgbClr val="666666"/>
-                </a:solidFill>
-              </a:rPr>
-              <a:t>anotasi</a:t>
-            </a:r>
-            <a:r>
-              <a:rPr sz="850" dirty="0">
-                <a:solidFill>
-                  <a:srgbClr val="666666"/>
-                </a:solidFill>
-              </a:rPr>
-              <a:t> manual, real-time</a:t>
-            </a:r>
-          </a:p>
-          <a:p>
-            <a:endParaRPr sz="850" dirty="0">
-              <a:solidFill>
-                <a:srgbClr val="666666"/>
-              </a:solidFill>
-            </a:endParaRPr>
-          </a:p>
-          <a:p>
-            <a:r>
-              <a:rPr sz="1150" b="1" dirty="0">
-                <a:solidFill>
-                  <a:srgbClr val="1A73E8"/>
-                </a:solidFill>
-              </a:rPr>
-              <a:t>  References</a:t>
-            </a:r>
-          </a:p>
-          <a:p>
-            <a:r>
-              <a:rPr sz="850" dirty="0">
-                <a:solidFill>
-                  <a:srgbClr val="666666"/>
-                </a:solidFill>
-              </a:rPr>
-              <a:t> </a:t>
+              <a:t>        •  20-25 sitasi (SOTA FER + affective computing + multimodal DL)</a:t>
             </a:r>
           </a:p>
         </p:txBody>
@@ -7627,7 +7302,7 @@
 </file>
 
 <file path=ppt/slides/slide4.xml><?xml version="1.0" encoding="utf-8"?>
-<p:sld xmlns:a="http://schemas.openxmlformats.org/drawingml/2006/main" xmlns:r="http://schemas.openxmlformats.org/officeDocument/2006/relationships" xmlns:p="http://schemas.openxmlformats.org/presentationml/2006/main">
+<p:sld xmlns:a="http://schemas.openxmlformats.org/drawingml/2006/main" xmlns:p="http://schemas.openxmlformats.org/presentationml/2006/main" xmlns:r="http://schemas.openxmlformats.org/officeDocument/2006/relationships">
   <p:cSld>
     <p:spTree>
       <p:nvGrpSpPr>
@@ -7635,14 +7310,7 @@
         <p:cNvGrpSpPr/>
         <p:nvPr/>
       </p:nvGrpSpPr>
-      <p:grpSpPr>
-        <a:xfrm>
-          <a:off x="0" y="0"/>
-          <a:ext cx="0" cy="0"/>
-          <a:chOff x="0" y="0"/>
-          <a:chExt cx="0" cy="0"/>
-        </a:xfrm>
-      </p:grpSpPr>
+      <p:grpSpPr/>
       <p:sp>
         <p:nvSpPr>
           <p:cNvPr id="2" name="TextBox 1"/>
@@ -7857,7 +7525,7 @@
                   <a:srgbClr val="202020"/>
                 </a:solidFill>
               </a:rPr>
-              <a:t>2. Studi komparatif sistematis 4 arsitektur (CNN, FCNN, Intermediate Fusion, Late Fusion) dengan/tanpa transfer learning.</a:t>
+              <a:t>2. Studi komparatif sistematis 5 arsitektur (CNN, FCNN, Early Fusion, Intermediate Fusion, Late Fusion) dengan/tanpa transfer learning — mencakup seluruh spektrum fusion point (input → feature → decision).</a:t>
             </a:r>
           </a:p>
           <a:p>
@@ -7868,7 +7536,7 @@
                   <a:srgbClr val="202020"/>
                 </a:solidFill>
               </a:rPr>
-              <a:t>3. Evaluasi menyeluruh 48 konfigurasi dengan 3 metrik F1 (Macro, Micro, Weighted) untuk data imbalanced.</a:t>
+              <a:t>3. Evaluasi menyeluruh 60 konfigurasi dengan 3 metrik F1 (Macro, Micro, Weighted) untuk data imbalanced.</a:t>
             </a:r>
           </a:p>
         </p:txBody>
@@ -7882,7 +7550,7 @@
 </file>
 
 <file path=ppt/slides/slide5.xml><?xml version="1.0" encoding="utf-8"?>
-<p:sld xmlns:a="http://schemas.openxmlformats.org/drawingml/2006/main" xmlns:r="http://schemas.openxmlformats.org/officeDocument/2006/relationships" xmlns:p="http://schemas.openxmlformats.org/presentationml/2006/main">
+<p:sld xmlns:a="http://schemas.openxmlformats.org/drawingml/2006/main" xmlns:p="http://schemas.openxmlformats.org/presentationml/2006/main" xmlns:r="http://schemas.openxmlformats.org/officeDocument/2006/relationships">
   <p:cSld>
     <p:spTree>
       <p:nvGrpSpPr>
@@ -7890,14 +7558,7 @@
         <p:cNvGrpSpPr/>
         <p:nvPr/>
       </p:nvGrpSpPr>
-      <p:grpSpPr>
-        <a:xfrm>
-          <a:off x="0" y="0"/>
-          <a:ext cx="0" cy="0"/>
-          <a:chOff x="0" y="0"/>
-          <a:chExt cx="0" cy="0"/>
-        </a:xfrm>
-      </p:grpSpPr>
+      <p:grpSpPr/>
       <p:sp>
         <p:nvSpPr>
           <p:cNvPr id="2" name="TextBox 1"/>
@@ -7968,11 +7629,10 @@
           </a:p>
           <a:p>
             <a:pPr algn="l"/>
-            <a:endParaRPr sz="1200" b="1" i="0">
-              <a:solidFill>
-                <a:srgbClr val="D93C3C"/>
-              </a:solidFill>
-            </a:endParaRPr>
+            <a:r>
+              <a:rPr sz="300" b="0" i="0"/>
+              <a:t/>
+            </a:r>
           </a:p>
           <a:p>
             <a:r>
@@ -7994,11 +7654,10 @@
           </a:p>
           <a:p>
             <a:pPr algn="l"/>
-            <a:endParaRPr sz="1000">
-              <a:solidFill>
-                <a:srgbClr val="202020"/>
-              </a:solidFill>
-            </a:endParaRPr>
+            <a:r>
+              <a:rPr sz="300" b="0" i="0"/>
+              <a:t/>
+            </a:r>
           </a:p>
           <a:p>
             <a:r>
@@ -8020,11 +7679,10 @@
           </a:p>
           <a:p>
             <a:pPr algn="l"/>
-            <a:endParaRPr sz="1000">
-              <a:solidFill>
-                <a:srgbClr val="202020"/>
-              </a:solidFill>
-            </a:endParaRPr>
+            <a:r>
+              <a:rPr sz="300" b="0" i="0"/>
+              <a:t/>
+            </a:r>
           </a:p>
           <a:p>
             <a:r>
@@ -8072,418 +7730,121 @@
           <a:p>
             <a:pPr algn="l"/>
             <a:r>
-              <a:rPr sz="1200" b="1" i="0" dirty="0">
+              <a:rPr sz="1200" b="1" i="0">
                 <a:solidFill>
                   <a:srgbClr val="0F9D58"/>
                 </a:solidFill>
               </a:rPr>
-              <a:t>Tujuan </a:t>
-            </a:r>
-            <a:r>
-              <a:rPr sz="1200" b="1" i="0" dirty="0" err="1">
-                <a:solidFill>
-                  <a:srgbClr val="0F9D58"/>
-                </a:solidFill>
-              </a:rPr>
-              <a:t>Penelitian</a:t>
-            </a:r>
-            <a:endParaRPr sz="1200" b="1" i="0" dirty="0">
-              <a:solidFill>
-                <a:srgbClr val="0F9D58"/>
-              </a:solidFill>
-            </a:endParaRPr>
-          </a:p>
-          <a:p>
-            <a:pPr algn="l"/>
-            <a:endParaRPr sz="1200" b="1" i="0" dirty="0">
-              <a:solidFill>
-                <a:srgbClr val="0F9D58"/>
-              </a:solidFill>
-            </a:endParaRPr>
-          </a:p>
-          <a:p>
-            <a:pPr algn="l"/>
-            <a:r>
-              <a:rPr sz="1000" b="0" i="0" dirty="0">
-                <a:solidFill>
-                  <a:srgbClr val="202020"/>
-                </a:solidFill>
-              </a:rPr>
-              <a:t>1. </a:t>
-            </a:r>
-            <a:r>
-              <a:rPr sz="1000" b="0" i="0" dirty="0" err="1">
-                <a:solidFill>
-                  <a:srgbClr val="202020"/>
-                </a:solidFill>
-              </a:rPr>
-              <a:t>Mengembangkan</a:t>
-            </a:r>
-            <a:r>
-              <a:rPr sz="1000" b="0" i="0" dirty="0">
-                <a:solidFill>
-                  <a:srgbClr val="202020"/>
-                </a:solidFill>
-              </a:rPr>
-              <a:t> pipeline FER multimodal (</a:t>
-            </a:r>
-            <a:r>
-              <a:rPr sz="1000" b="0" i="0" dirty="0" err="1">
-                <a:solidFill>
-                  <a:srgbClr val="202020"/>
-                </a:solidFill>
-              </a:rPr>
-              <a:t>citra</a:t>
-            </a:r>
-            <a:r>
-              <a:rPr sz="1000" b="0" i="0" dirty="0">
-                <a:solidFill>
-                  <a:srgbClr val="202020"/>
-                </a:solidFill>
-              </a:rPr>
-              <a:t> + landmark) </a:t>
-            </a:r>
-            <a:r>
-              <a:rPr sz="1000" b="0" i="0" dirty="0" err="1">
-                <a:solidFill>
-                  <a:srgbClr val="202020"/>
-                </a:solidFill>
-              </a:rPr>
-              <a:t>untuk</a:t>
-            </a:r>
-            <a:r>
-              <a:rPr sz="1000" b="0" i="0" dirty="0">
-                <a:solidFill>
-                  <a:srgbClr val="202020"/>
-                </a:solidFill>
-              </a:rPr>
-              <a:t> </a:t>
-            </a:r>
-            <a:r>
-              <a:rPr sz="1000" b="0" i="0" dirty="0" err="1">
-                <a:solidFill>
-                  <a:srgbClr val="202020"/>
-                </a:solidFill>
-              </a:rPr>
-              <a:t>konteks</a:t>
-            </a:r>
-            <a:r>
-              <a:rPr sz="1000" b="0" i="0" dirty="0">
-                <a:solidFill>
-                  <a:srgbClr val="202020"/>
-                </a:solidFill>
-              </a:rPr>
-              <a:t> </a:t>
-            </a:r>
-            <a:r>
-              <a:rPr sz="1000" b="0" i="0" dirty="0" err="1">
-                <a:solidFill>
-                  <a:srgbClr val="202020"/>
-                </a:solidFill>
-              </a:rPr>
-              <a:t>pembelajaran</a:t>
-            </a:r>
-            <a:r>
-              <a:rPr sz="1000" b="0" i="0" dirty="0">
-                <a:solidFill>
-                  <a:srgbClr val="202020"/>
-                </a:solidFill>
-              </a:rPr>
-              <a:t> </a:t>
-            </a:r>
-            <a:r>
-              <a:rPr sz="1000" b="0" i="0" dirty="0" err="1">
-                <a:solidFill>
-                  <a:srgbClr val="202020"/>
-                </a:solidFill>
-              </a:rPr>
-              <a:t>pemrograman</a:t>
-            </a:r>
-            <a:r>
-              <a:rPr sz="1000" b="0" i="0" dirty="0">
-                <a:solidFill>
-                  <a:srgbClr val="202020"/>
-                </a:solidFill>
-              </a:rPr>
-              <a:t>.</a:t>
-            </a:r>
-          </a:p>
-          <a:p>
-            <a:pPr algn="l"/>
-            <a:r>
-              <a:rPr sz="1000" b="0" i="0" dirty="0">
-                <a:solidFill>
-                  <a:srgbClr val="202020"/>
-                </a:solidFill>
-              </a:rPr>
-              <a:t>2. </a:t>
-            </a:r>
-            <a:r>
-              <a:rPr sz="1000" b="0" i="0" dirty="0" err="1">
-                <a:solidFill>
-                  <a:srgbClr val="202020"/>
-                </a:solidFill>
-              </a:rPr>
-              <a:t>Menentukan</a:t>
-            </a:r>
-            <a:r>
-              <a:rPr sz="1000" b="0" i="0" dirty="0">
-                <a:solidFill>
-                  <a:srgbClr val="202020"/>
-                </a:solidFill>
-              </a:rPr>
-              <a:t> </a:t>
-            </a:r>
-            <a:r>
-              <a:rPr sz="1000" b="0" i="0" dirty="0" err="1">
-                <a:solidFill>
-                  <a:srgbClr val="202020"/>
-                </a:solidFill>
-              </a:rPr>
-              <a:t>arsitektur</a:t>
-            </a:r>
-            <a:r>
-              <a:rPr sz="1000" b="0" i="0" dirty="0">
-                <a:solidFill>
-                  <a:srgbClr val="202020"/>
-                </a:solidFill>
-              </a:rPr>
-              <a:t> fusion dan strategi transfer learning yang optimal </a:t>
-            </a:r>
-            <a:r>
-              <a:rPr sz="1000" b="0" i="0" dirty="0" err="1">
-                <a:solidFill>
-                  <a:srgbClr val="202020"/>
-                </a:solidFill>
-              </a:rPr>
-              <a:t>melalui</a:t>
-            </a:r>
-            <a:r>
-              <a:rPr sz="1000" b="0" i="0" dirty="0">
-                <a:solidFill>
-                  <a:srgbClr val="202020"/>
-                </a:solidFill>
-              </a:rPr>
-              <a:t> </a:t>
-            </a:r>
-            <a:r>
-              <a:rPr sz="1000" b="0" i="0" dirty="0" err="1">
-                <a:solidFill>
-                  <a:srgbClr val="202020"/>
-                </a:solidFill>
-              </a:rPr>
-              <a:t>studi</a:t>
-            </a:r>
-            <a:r>
-              <a:rPr sz="1000" b="0" i="0" dirty="0">
-                <a:solidFill>
-                  <a:srgbClr val="202020"/>
-                </a:solidFill>
-              </a:rPr>
-              <a:t> 48 </a:t>
-            </a:r>
-            <a:r>
-              <a:rPr sz="1000" b="0" i="0" dirty="0" err="1">
-                <a:solidFill>
-                  <a:srgbClr val="202020"/>
-                </a:solidFill>
-              </a:rPr>
-              <a:t>konfigurasi</a:t>
-            </a:r>
-            <a:r>
-              <a:rPr sz="1000" b="0" i="0" dirty="0">
-                <a:solidFill>
-                  <a:srgbClr val="202020"/>
-                </a:solidFill>
-              </a:rPr>
-              <a:t> </a:t>
-            </a:r>
-            <a:r>
-              <a:rPr sz="1000" b="0" i="0" dirty="0" err="1">
-                <a:solidFill>
-                  <a:srgbClr val="202020"/>
-                </a:solidFill>
-              </a:rPr>
-              <a:t>eksperimen</a:t>
-            </a:r>
-            <a:r>
-              <a:rPr sz="1000" b="0" i="0" dirty="0">
-                <a:solidFill>
-                  <a:srgbClr val="202020"/>
-                </a:solidFill>
-              </a:rPr>
-              <a:t>.</a:t>
-            </a:r>
-          </a:p>
-          <a:p>
-            <a:pPr algn="l"/>
-            <a:r>
-              <a:rPr sz="1000" b="0" i="0" dirty="0">
-                <a:solidFill>
-                  <a:srgbClr val="202020"/>
-                </a:solidFill>
-              </a:rPr>
-              <a:t>3. </a:t>
-            </a:r>
-            <a:r>
-              <a:rPr sz="1000" b="0" i="0" dirty="0" err="1">
-                <a:solidFill>
-                  <a:srgbClr val="202020"/>
-                </a:solidFill>
-              </a:rPr>
-              <a:t>Menyajikan</a:t>
-            </a:r>
-            <a:r>
-              <a:rPr sz="1000" b="0" i="0" dirty="0">
-                <a:solidFill>
-                  <a:srgbClr val="202020"/>
-                </a:solidFill>
-              </a:rPr>
-              <a:t> </a:t>
-            </a:r>
-            <a:r>
-              <a:rPr sz="1000" b="0" i="0" dirty="0" err="1">
-                <a:solidFill>
-                  <a:srgbClr val="202020"/>
-                </a:solidFill>
-              </a:rPr>
-              <a:t>analisis</a:t>
-            </a:r>
-            <a:r>
-              <a:rPr sz="1000" b="0" i="0" dirty="0">
-                <a:solidFill>
-                  <a:srgbClr val="202020"/>
-                </a:solidFill>
-              </a:rPr>
-              <a:t> per-</a:t>
-            </a:r>
-            <a:r>
-              <a:rPr sz="1000" b="0" i="0" dirty="0" err="1">
-                <a:solidFill>
-                  <a:srgbClr val="202020"/>
-                </a:solidFill>
-              </a:rPr>
-              <a:t>kelas</a:t>
-            </a:r>
-            <a:r>
-              <a:rPr sz="1000" b="0" i="0" dirty="0">
-                <a:solidFill>
-                  <a:srgbClr val="202020"/>
-                </a:solidFill>
-              </a:rPr>
-              <a:t> </a:t>
-            </a:r>
-            <a:r>
-              <a:rPr sz="1000" b="0" i="0" dirty="0" err="1">
-                <a:solidFill>
-                  <a:srgbClr val="202020"/>
-                </a:solidFill>
-              </a:rPr>
-              <a:t>emosi</a:t>
-            </a:r>
-            <a:r>
-              <a:rPr sz="1000" b="0" i="0" dirty="0">
-                <a:solidFill>
-                  <a:srgbClr val="202020"/>
-                </a:solidFill>
-              </a:rPr>
-              <a:t> </a:t>
-            </a:r>
-            <a:r>
-              <a:rPr sz="1000" b="0" i="0" dirty="0" err="1">
-                <a:solidFill>
-                  <a:srgbClr val="202020"/>
-                </a:solidFill>
-              </a:rPr>
-              <a:t>untuk</a:t>
-            </a:r>
-            <a:r>
-              <a:rPr sz="1000" b="0" i="0" dirty="0">
-                <a:solidFill>
-                  <a:srgbClr val="202020"/>
-                </a:solidFill>
-              </a:rPr>
-              <a:t> </a:t>
-            </a:r>
-            <a:r>
-              <a:rPr sz="1000" b="0" i="0" dirty="0" err="1">
-                <a:solidFill>
-                  <a:srgbClr val="202020"/>
-                </a:solidFill>
-              </a:rPr>
-              <a:t>memahami</a:t>
-            </a:r>
-            <a:r>
-              <a:rPr sz="1000" b="0" i="0" dirty="0">
-                <a:solidFill>
-                  <a:srgbClr val="202020"/>
-                </a:solidFill>
-              </a:rPr>
-              <a:t> </a:t>
-            </a:r>
-            <a:r>
-              <a:rPr sz="1000" b="0" i="0" dirty="0" err="1">
-                <a:solidFill>
-                  <a:srgbClr val="202020"/>
-                </a:solidFill>
-              </a:rPr>
-              <a:t>perilaku</a:t>
-            </a:r>
-            <a:r>
-              <a:rPr sz="1000" b="0" i="0" dirty="0">
-                <a:solidFill>
-                  <a:srgbClr val="202020"/>
-                </a:solidFill>
-              </a:rPr>
-              <a:t> model pada data </a:t>
-            </a:r>
-            <a:r>
-              <a:rPr sz="1000" b="0" i="0" dirty="0" err="1">
-                <a:solidFill>
-                  <a:srgbClr val="202020"/>
-                </a:solidFill>
-              </a:rPr>
-              <a:t>minoritas</a:t>
-            </a:r>
-            <a:r>
-              <a:rPr sz="1000" b="0" i="0" dirty="0">
-                <a:solidFill>
-                  <a:srgbClr val="202020"/>
-                </a:solidFill>
-              </a:rPr>
-              <a:t> </a:t>
-            </a:r>
-            <a:r>
-              <a:rPr sz="1000" b="0" i="0" dirty="0" err="1">
-                <a:solidFill>
-                  <a:srgbClr val="202020"/>
-                </a:solidFill>
-              </a:rPr>
-              <a:t>dalam</a:t>
-            </a:r>
-            <a:r>
-              <a:rPr sz="1000" b="0" i="0" dirty="0">
-                <a:solidFill>
-                  <a:srgbClr val="202020"/>
-                </a:solidFill>
-              </a:rPr>
-              <a:t> </a:t>
-            </a:r>
-            <a:r>
-              <a:rPr sz="1000" b="0" i="0" dirty="0" err="1">
-                <a:solidFill>
-                  <a:srgbClr val="202020"/>
-                </a:solidFill>
-              </a:rPr>
-              <a:t>konteks</a:t>
-            </a:r>
-            <a:r>
-              <a:rPr sz="1000" b="0" i="0" dirty="0">
-                <a:solidFill>
-                  <a:srgbClr val="202020"/>
-                </a:solidFill>
-              </a:rPr>
-              <a:t> natural.</a:t>
+              <a:t>Tujuan Penelitian</a:t>
+            </a:r>
+          </a:p>
+          <a:p>
+            <a:pPr algn="l"/>
+            <a:r>
+              <a:rPr sz="200" b="0" i="0"/>
+              <a:t/>
+            </a:r>
+          </a:p>
+          <a:p>
+            <a:pPr algn="l"/>
+            <a:r>
+              <a:rPr sz="1000" b="0" i="0">
+                <a:solidFill>
+                  <a:srgbClr val="202020"/>
+                </a:solidFill>
+              </a:rPr>
+              <a:t>1. Mengembangkan pipeline FER multimodal (citra + landmark) untuk konteks pembelajaran pemrograman.</a:t>
+            </a:r>
+          </a:p>
+          <a:p>
+            <a:pPr algn="l"/>
+            <a:r>
+              <a:rPr sz="1000" b="0" i="0">
+                <a:solidFill>
+                  <a:srgbClr val="202020"/>
+                </a:solidFill>
+              </a:rPr>
+              <a:t>2. Menentukan arsitektur fusion dan strategi transfer learning yang optimal melalui studi 48 konfigurasi eksperimen.</a:t>
+            </a:r>
+          </a:p>
+          <a:p>
+            <a:pPr algn="l"/>
+            <a:r>
+              <a:rPr sz="1000" b="0" i="0">
+                <a:solidFill>
+                  <a:srgbClr val="202020"/>
+                </a:solidFill>
+              </a:rPr>
+              <a:t>3. Menyajikan analisis per-kelas emosi untuk memahami perilaku model pada data minoritas dalam konteks natural.</a:t>
+            </a:r>
+          </a:p>
+        </p:txBody>
+      </p:sp>
+      <p:sp>
+        <p:nvSpPr>
+          <p:cNvPr id="5" name="TextBox 4"/>
+          <p:cNvSpPr txBox="1"/>
+          <p:nvPr/>
+        </p:nvSpPr>
+        <p:spPr>
+          <a:xfrm>
+            <a:off x="274320" y="3611880"/>
+            <a:ext cx="8595360" cy="1143000"/>
+          </a:xfrm>
+          <a:prstGeom prst="rect">
+            <a:avLst/>
+          </a:prstGeom>
+          <a:solidFill>
+            <a:srgbClr val="E8F0FE"/>
+          </a:solidFill>
+        </p:spPr>
+        <p:txBody>
+          <a:bodyPr wrap="square">
+            <a:spAutoFit/>
+          </a:bodyPr>
+          <a:lstStyle/>
+          <a:p>
+            <a:pPr algn="l"/>
+            <a:r>
+              <a:rPr sz="1100" b="1" i="0">
+                <a:solidFill>
+                  <a:srgbClr val="1A73E8"/>
+                </a:solidFill>
+              </a:rPr>
+              <a:t>Target Publikasi: JITeCS (Journal of Information Technology and Computer Science)</a:t>
+            </a:r>
+          </a:p>
+          <a:p>
+            <a:pPr algn="l"/>
+            <a:r>
+              <a:rPr sz="950" b="0" i="0">
+                <a:solidFill>
+                  <a:srgbClr val="202020"/>
+                </a:solidFill>
+              </a:rPr>
+              <a:t>• Terindeks SINTA 2 • Accredited oleh Kemenristekdikti • Peer-reviewed</a:t>
+            </a:r>
+          </a:p>
+          <a:p>
+            <a:pPr algn="l"/>
+            <a:r>
+              <a:rPr sz="950" b="0" i="0">
+                <a:solidFill>
+                  <a:srgbClr val="202020"/>
+                </a:solidFill>
+              </a:rPr>
+              <a:t>• Scope: IT, data science, machine learning, applied computing — relevan dengan topik FER untuk education tech.</a:t>
+            </a:r>
+          </a:p>
+          <a:p>
+            <a:pPr algn="l"/>
+            <a:r>
+              <a:rPr sz="950" b="0" i="0">
+                <a:solidFill>
+                  <a:srgbClr val="202020"/>
+                </a:solidFill>
+              </a:rPr>
+              <a:t>• Format: 8-12 halaman IEEE, 20-30 referensi.</a:t>
             </a:r>
           </a:p>
         </p:txBody>
@@ -8497,7 +7858,7 @@
 </file>
 
 <file path=ppt/slides/slide6.xml><?xml version="1.0" encoding="utf-8"?>
-<p:sld xmlns:a="http://schemas.openxmlformats.org/drawingml/2006/main" xmlns:r="http://schemas.openxmlformats.org/officeDocument/2006/relationships" xmlns:p="http://schemas.openxmlformats.org/presentationml/2006/main">
+<p:sld xmlns:a="http://schemas.openxmlformats.org/drawingml/2006/main" xmlns:p="http://schemas.openxmlformats.org/presentationml/2006/main" xmlns:r="http://schemas.openxmlformats.org/officeDocument/2006/relationships">
   <p:cSld>
     <p:spTree>
       <p:nvGrpSpPr>
@@ -8505,14 +7866,7 @@
         <p:cNvGrpSpPr/>
         <p:nvPr/>
       </p:nvGrpSpPr>
-      <p:grpSpPr>
-        <a:xfrm>
-          <a:off x="0" y="0"/>
-          <a:ext cx="0" cy="0"/>
-          <a:chOff x="0" y="0"/>
-          <a:chExt cx="0" cy="0"/>
-        </a:xfrm>
-      </p:grpSpPr>
+      <p:grpSpPr/>
       <p:sp>
         <p:nvSpPr>
           <p:cNvPr id="2" name="TextBox 1"/>
@@ -8583,11 +7937,10 @@
           </a:p>
           <a:p>
             <a:pPr algn="l"/>
-            <a:endParaRPr sz="1200" b="1" i="0">
-              <a:solidFill>
-                <a:srgbClr val="1A73E8"/>
-              </a:solidFill>
-            </a:endParaRPr>
+            <a:r>
+              <a:rPr sz="300" b="0" i="0"/>
+              <a:t/>
+            </a:r>
           </a:p>
           <a:p>
             <a:pPr algn="l"/>
@@ -8613,11 +7966,10 @@
           </a:p>
           <a:p>
             <a:pPr algn="l"/>
-            <a:endParaRPr sz="1000" b="0" i="0">
-              <a:solidFill>
-                <a:srgbClr val="666666"/>
-              </a:solidFill>
-            </a:endParaRPr>
+            <a:r>
+              <a:rPr sz="200" b="0" i="0"/>
+              <a:t/>
+            </a:r>
           </a:p>
           <a:p>
             <a:pPr algn="l"/>
@@ -8643,11 +7995,10 @@
           </a:p>
           <a:p>
             <a:pPr algn="l"/>
-            <a:endParaRPr sz="1000" b="0" i="0">
-              <a:solidFill>
-                <a:srgbClr val="666666"/>
-              </a:solidFill>
-            </a:endParaRPr>
+            <a:r>
+              <a:rPr sz="200" b="0" i="0"/>
+              <a:t/>
+            </a:r>
           </a:p>
           <a:p>
             <a:pPr algn="l"/>
@@ -8673,11 +8024,10 @@
           </a:p>
           <a:p>
             <a:pPr algn="l"/>
-            <a:endParaRPr sz="1000" b="0" i="0">
-              <a:solidFill>
-                <a:srgbClr val="666666"/>
-              </a:solidFill>
-            </a:endParaRPr>
+            <a:r>
+              <a:rPr sz="200" b="0" i="0"/>
+              <a:t/>
+            </a:r>
           </a:p>
           <a:p>
             <a:pPr algn="l"/>
@@ -8699,6 +8049,64 @@
                 </a:solidFill>
               </a:rPr>
               <a:t>   Emotion recognition untuk learning analytics, MOOC engagement, adaptive tutoring system.</a:t>
+            </a:r>
+          </a:p>
+        </p:txBody>
+      </p:sp>
+      <p:sp>
+        <p:nvSpPr>
+          <p:cNvPr id="4" name="TextBox 3"/>
+          <p:cNvSpPr txBox="1"/>
+          <p:nvPr/>
+        </p:nvSpPr>
+        <p:spPr>
+          <a:xfrm>
+            <a:off x="274320" y="3794760"/>
+            <a:ext cx="8595360" cy="1005840"/>
+          </a:xfrm>
+          <a:prstGeom prst="rect">
+            <a:avLst/>
+          </a:prstGeom>
+          <a:solidFill>
+            <a:srgbClr val="FFF0CC"/>
+          </a:solidFill>
+        </p:spPr>
+        <p:txBody>
+          <a:bodyPr wrap="square">
+            <a:spAutoFit/>
+          </a:bodyPr>
+          <a:lstStyle/>
+          <a:p>
+            <a:pPr algn="l"/>
+            <a:r>
+              <a:rPr sz="1000" b="1" i="0">
+                <a:solidFill>
+                  <a:srgbClr val="202020"/>
+                </a:solidFill>
+              </a:rPr>
+              <a:t>Catatan</a:t>
+            </a:r>
+          </a:p>
+          <a:p>
+            <a:pPr algn="l"/>
+            <a:r>
+              <a:rPr sz="950" b="0" i="0">
+                <a:solidFill>
+                  <a:srgbClr val="202020"/>
+                </a:solidFill>
+              </a:rPr>
+              <a:t>• Pemilihan paper spesifik (20-25 sitasi) dilakukan saat drafting — fokus pada relevansi metodologis.</a:t>
+            </a:r>
+          </a:p>
+          <a:p>
+            <a:pPr algn="l"/>
+            <a:r>
+              <a:rPr sz="950" b="0" i="0">
+                <a:solidFill>
+                  <a:srgbClr val="202020"/>
+                </a:solidFill>
+              </a:rPr>
+              <a:t>• Posisi paper ini akan dirumuskan setelah review selesai (konsultasi dengan pembimbing).</a:t>
             </a:r>
           </a:p>
         </p:txBody>
@@ -8712,7 +8120,7 @@
 </file>
 
 <file path=ppt/slides/slide7.xml><?xml version="1.0" encoding="utf-8"?>
-<p:sld xmlns:a="http://schemas.openxmlformats.org/drawingml/2006/main" xmlns:r="http://schemas.openxmlformats.org/officeDocument/2006/relationships" xmlns:p="http://schemas.openxmlformats.org/presentationml/2006/main">
+<p:sld xmlns:a="http://schemas.openxmlformats.org/drawingml/2006/main" xmlns:p="http://schemas.openxmlformats.org/presentationml/2006/main" xmlns:r="http://schemas.openxmlformats.org/officeDocument/2006/relationships">
   <p:cSld>
     <p:spTree>
       <p:nvGrpSpPr>
@@ -8720,14 +8128,7 @@
         <p:cNvGrpSpPr/>
         <p:nvPr/>
       </p:nvGrpSpPr>
-      <p:grpSpPr>
-        <a:xfrm>
-          <a:off x="0" y="0"/>
-          <a:ext cx="0" cy="0"/>
-          <a:chOff x="0" y="0"/>
-          <a:chExt cx="0" cy="0"/>
-        </a:xfrm>
-      </p:grpSpPr>
+      <p:grpSpPr/>
       <p:sp>
         <p:nvSpPr>
           <p:cNvPr id="2" name="TextBox 1"/>
@@ -8788,280 +8189,85 @@
           <a:p>
             <a:pPr algn="l"/>
             <a:r>
-              <a:rPr sz="1100" b="1" i="0" dirty="0" err="1">
+              <a:rPr sz="1100" b="1" i="0">
                 <a:solidFill>
                   <a:srgbClr val="1A73E8"/>
                 </a:solidFill>
               </a:rPr>
               <a:t>Karakteristik</a:t>
             </a:r>
-            <a:endParaRPr sz="1100" b="1" i="0" dirty="0">
-              <a:solidFill>
-                <a:srgbClr val="1A73E8"/>
-              </a:solidFill>
-            </a:endParaRPr>
-          </a:p>
-          <a:p>
-            <a:pPr algn="l"/>
-            <a:endParaRPr sz="1100" b="1" i="0" dirty="0">
-              <a:solidFill>
-                <a:srgbClr val="1A73E8"/>
-              </a:solidFill>
-            </a:endParaRPr>
-          </a:p>
-          <a:p>
-            <a:pPr algn="l"/>
-            <a:r>
-              <a:rPr sz="1000" b="0" i="0" dirty="0">
-                <a:solidFill>
-                  <a:srgbClr val="202020"/>
-                </a:solidFill>
-              </a:rPr>
-              <a:t>• 37 </a:t>
-            </a:r>
-            <a:r>
-              <a:rPr sz="1000" b="0" i="0" dirty="0" err="1">
-                <a:solidFill>
-                  <a:srgbClr val="202020"/>
-                </a:solidFill>
-              </a:rPr>
-              <a:t>mahasiswa</a:t>
-            </a:r>
-            <a:r>
-              <a:rPr sz="1000" b="0" i="0" dirty="0">
-                <a:solidFill>
-                  <a:srgbClr val="202020"/>
-                </a:solidFill>
-              </a:rPr>
-              <a:t> (2 batch data collection)</a:t>
-            </a:r>
-          </a:p>
-          <a:p>
-            <a:pPr algn="l"/>
-            <a:r>
-              <a:rPr sz="1000" b="0" i="0" dirty="0">
-                <a:solidFill>
-                  <a:srgbClr val="202020"/>
-                </a:solidFill>
-              </a:rPr>
-              <a:t>• 7.091 frame </a:t>
-            </a:r>
-            <a:r>
-              <a:rPr sz="1000" b="0" i="0" dirty="0" err="1">
-                <a:solidFill>
-                  <a:srgbClr val="202020"/>
-                </a:solidFill>
-              </a:rPr>
-              <a:t>wajah</a:t>
-            </a:r>
-            <a:r>
-              <a:rPr sz="1000" b="0" i="0" dirty="0">
-                <a:solidFill>
-                  <a:srgbClr val="202020"/>
-                </a:solidFill>
-              </a:rPr>
-              <a:t> (front-view)</a:t>
-            </a:r>
-          </a:p>
-          <a:p>
-            <a:pPr algn="l"/>
-            <a:r>
-              <a:rPr sz="1000" b="0" i="0" dirty="0">
-                <a:solidFill>
-                  <a:srgbClr val="202020"/>
-                </a:solidFill>
-              </a:rPr>
-              <a:t>• </a:t>
-            </a:r>
-            <a:r>
-              <a:rPr sz="1000" b="0" i="0" dirty="0" err="1">
-                <a:solidFill>
-                  <a:srgbClr val="202020"/>
-                </a:solidFill>
-              </a:rPr>
-              <a:t>Durasi</a:t>
-            </a:r>
-            <a:r>
-              <a:rPr sz="1000" b="0" i="0" dirty="0">
-                <a:solidFill>
-                  <a:srgbClr val="202020"/>
-                </a:solidFill>
-              </a:rPr>
-              <a:t>: </a:t>
-            </a:r>
-            <a:r>
-              <a:rPr sz="1000" b="0" i="0" dirty="0" err="1">
-                <a:solidFill>
-                  <a:srgbClr val="202020"/>
-                </a:solidFill>
-              </a:rPr>
-              <a:t>sesi</a:t>
-            </a:r>
-            <a:r>
-              <a:rPr sz="1000" b="0" i="0" dirty="0">
-                <a:solidFill>
-                  <a:srgbClr val="202020"/>
-                </a:solidFill>
-              </a:rPr>
-              <a:t> </a:t>
-            </a:r>
-            <a:r>
-              <a:rPr sz="1000" b="0" i="0" dirty="0" err="1">
-                <a:solidFill>
-                  <a:srgbClr val="202020"/>
-                </a:solidFill>
-              </a:rPr>
-              <a:t>pemrograman</a:t>
-            </a:r>
-            <a:r>
-              <a:rPr sz="1000" b="0" i="0" dirty="0">
-                <a:solidFill>
-                  <a:srgbClr val="202020"/>
-                </a:solidFill>
-              </a:rPr>
-              <a:t> 30-60 </a:t>
-            </a:r>
-            <a:r>
-              <a:rPr sz="1000" b="0" i="0" dirty="0" err="1">
-                <a:solidFill>
-                  <a:srgbClr val="202020"/>
-                </a:solidFill>
-              </a:rPr>
-              <a:t>menit</a:t>
-            </a:r>
-            <a:endParaRPr sz="1000" b="0" i="0" dirty="0">
-              <a:solidFill>
-                <a:srgbClr val="202020"/>
-              </a:solidFill>
-            </a:endParaRPr>
-          </a:p>
-          <a:p>
-            <a:pPr algn="l"/>
-            <a:r>
-              <a:rPr sz="1000" b="0" i="0" dirty="0">
-                <a:solidFill>
-                  <a:srgbClr val="202020"/>
-                </a:solidFill>
-              </a:rPr>
-              <a:t>• 7 </a:t>
-            </a:r>
-            <a:r>
-              <a:rPr sz="1000" b="0" i="0" dirty="0" err="1">
-                <a:solidFill>
-                  <a:srgbClr val="202020"/>
-                </a:solidFill>
-              </a:rPr>
-              <a:t>kelas</a:t>
-            </a:r>
-            <a:r>
-              <a:rPr sz="1000" b="0" i="0" dirty="0">
-                <a:solidFill>
-                  <a:srgbClr val="202020"/>
-                </a:solidFill>
-              </a:rPr>
-              <a:t> </a:t>
-            </a:r>
-            <a:r>
-              <a:rPr sz="1000" b="0" i="0" dirty="0" err="1">
-                <a:solidFill>
-                  <a:srgbClr val="202020"/>
-                </a:solidFill>
-              </a:rPr>
-              <a:t>emosi</a:t>
-            </a:r>
-            <a:r>
-              <a:rPr sz="1000" b="0" i="0" dirty="0">
-                <a:solidFill>
-                  <a:srgbClr val="202020"/>
-                </a:solidFill>
-              </a:rPr>
-              <a:t> (FER </a:t>
-            </a:r>
-            <a:r>
-              <a:rPr sz="1000" b="0" i="0" dirty="0" err="1">
-                <a:solidFill>
-                  <a:srgbClr val="202020"/>
-                </a:solidFill>
-              </a:rPr>
-              <a:t>standar</a:t>
-            </a:r>
-            <a:r>
-              <a:rPr sz="1000" b="0" i="0" dirty="0">
-                <a:solidFill>
-                  <a:srgbClr val="202020"/>
-                </a:solidFill>
-              </a:rPr>
-              <a:t>)</a:t>
-            </a:r>
-          </a:p>
-          <a:p>
-            <a:pPr algn="l"/>
-            <a:r>
-              <a:rPr sz="1000" b="0" i="0" dirty="0">
-                <a:solidFill>
-                  <a:srgbClr val="202020"/>
-                </a:solidFill>
-              </a:rPr>
-              <a:t>• </a:t>
-            </a:r>
-            <a:r>
-              <a:rPr sz="1000" b="0" i="0" dirty="0" err="1">
-                <a:solidFill>
-                  <a:srgbClr val="202020"/>
-                </a:solidFill>
-              </a:rPr>
-              <a:t>Anotasi</a:t>
-            </a:r>
-            <a:r>
-              <a:rPr sz="1000" b="0" i="0" dirty="0">
-                <a:solidFill>
-                  <a:srgbClr val="202020"/>
-                </a:solidFill>
-              </a:rPr>
-              <a:t>: Face API (confidence score)</a:t>
-            </a:r>
-          </a:p>
-          <a:p>
-            <a:pPr algn="l"/>
-            <a:r>
-              <a:rPr sz="1000" b="0" i="0" dirty="0">
-                <a:solidFill>
-                  <a:srgbClr val="202020"/>
-                </a:solidFill>
-              </a:rPr>
-              <a:t>• Split: user-wise 80/10/10 (</a:t>
-            </a:r>
-            <a:r>
-              <a:rPr sz="1000" b="0" i="0" dirty="0" err="1">
-                <a:solidFill>
-                  <a:srgbClr val="202020"/>
-                </a:solidFill>
-              </a:rPr>
-              <a:t>tidak</a:t>
-            </a:r>
-            <a:r>
-              <a:rPr sz="1000" b="0" i="0" dirty="0">
-                <a:solidFill>
-                  <a:srgbClr val="202020"/>
-                </a:solidFill>
-              </a:rPr>
-              <a:t> </a:t>
-            </a:r>
-            <a:r>
-              <a:rPr sz="1000" b="0" i="0" dirty="0" err="1">
-                <a:solidFill>
-                  <a:srgbClr val="202020"/>
-                </a:solidFill>
-              </a:rPr>
-              <a:t>ada</a:t>
-            </a:r>
-            <a:r>
-              <a:rPr sz="1000" b="0" i="0" dirty="0">
-                <a:solidFill>
-                  <a:srgbClr val="202020"/>
-                </a:solidFill>
-              </a:rPr>
-              <a:t> leakage)</a:t>
+          </a:p>
+          <a:p>
+            <a:pPr algn="l"/>
+            <a:r>
+              <a:rPr sz="300" b="0" i="0"/>
+              <a:t/>
+            </a:r>
+          </a:p>
+          <a:p>
+            <a:pPr algn="l"/>
+            <a:r>
+              <a:rPr sz="1000" b="0" i="0">
+                <a:solidFill>
+                  <a:srgbClr val="202020"/>
+                </a:solidFill>
+              </a:rPr>
+              <a:t>• 37 mahasiswa (2 batch data collection)</a:t>
+            </a:r>
+          </a:p>
+          <a:p>
+            <a:pPr algn="l"/>
+            <a:r>
+              <a:rPr sz="1000" b="0" i="0">
+                <a:solidFill>
+                  <a:srgbClr val="202020"/>
+                </a:solidFill>
+              </a:rPr>
+              <a:t>• 7.091 frame wajah (front-view)</a:t>
+            </a:r>
+          </a:p>
+          <a:p>
+            <a:pPr algn="l"/>
+            <a:r>
+              <a:rPr sz="1000" b="0" i="0">
+                <a:solidFill>
+                  <a:srgbClr val="202020"/>
+                </a:solidFill>
+              </a:rPr>
+              <a:t>• Durasi: sesi pemrograman 30-60 menit</a:t>
+            </a:r>
+          </a:p>
+          <a:p>
+            <a:pPr algn="l"/>
+            <a:r>
+              <a:rPr sz="1000" b="0" i="0">
+                <a:solidFill>
+                  <a:srgbClr val="202020"/>
+                </a:solidFill>
+              </a:rPr>
+              <a:t>• 7 kelas emosi (FER standar)</a:t>
+            </a:r>
+          </a:p>
+          <a:p>
+            <a:pPr algn="l"/>
+            <a:r>
+              <a:rPr sz="1000" b="0" i="0">
+                <a:solidFill>
+                  <a:srgbClr val="202020"/>
+                </a:solidFill>
+              </a:rPr>
+              <a:t>• Anotasi: Face API (confidence score)</a:t>
+            </a:r>
+          </a:p>
+          <a:p>
+            <a:pPr algn="l"/>
+            <a:r>
+              <a:rPr sz="1000" b="0" i="0">
+                <a:solidFill>
+                  <a:srgbClr val="202020"/>
+                </a:solidFill>
+              </a:rPr>
+              <a:t>• Split: user-wise 80/10/10 (tidak ada leakage)</a:t>
             </a:r>
           </a:p>
         </p:txBody>
@@ -9110,34 +8316,16 @@
         </p:nvGraphicFramePr>
         <p:xfrm>
           <a:off x="4572000" y="1051560"/>
-          <a:ext cx="4297680" cy="1748790"/>
+          <a:ext cx="4297680" cy="1737360"/>
         </p:xfrm>
         <a:graphic>
           <a:graphicData uri="http://schemas.openxmlformats.org/drawingml/2006/table">
             <a:tbl>
               <a:tblPr firstRow="1" bandRow="1"/>
               <a:tblGrid>
-                <a:gridCol w="1828800">
-                  <a:extLst>
-                    <a:ext uri="{9D8B030D-6E8A-4147-A177-3AD203B41FA5}">
-                      <a16:colId xmlns:a16="http://schemas.microsoft.com/office/drawing/2014/main" val="20000"/>
-                    </a:ext>
-                  </a:extLst>
-                </a:gridCol>
-                <a:gridCol w="1371600">
-                  <a:extLst>
-                    <a:ext uri="{9D8B030D-6E8A-4147-A177-3AD203B41FA5}">
-                      <a16:colId xmlns:a16="http://schemas.microsoft.com/office/drawing/2014/main" val="20001"/>
-                    </a:ext>
-                  </a:extLst>
-                </a:gridCol>
-                <a:gridCol w="1097280">
-                  <a:extLst>
-                    <a:ext uri="{9D8B030D-6E8A-4147-A177-3AD203B41FA5}">
-                      <a16:colId xmlns:a16="http://schemas.microsoft.com/office/drawing/2014/main" val="20002"/>
-                    </a:ext>
-                  </a:extLst>
-                </a:gridCol>
+                <a:gridCol w="1828800"/>
+                <a:gridCol w="1371600"/>
+                <a:gridCol w="1097280"/>
               </a:tblGrid>
               <a:tr h="217170">
                 <a:tc>
@@ -9206,11 +8394,6 @@
                     </a:solidFill>
                   </a:tcPr>
                 </a:tc>
-                <a:extLst>
-                  <a:ext uri="{0D108BD9-81ED-4DB2-BD59-A6C34878D82A}">
-                    <a16:rowId xmlns:a16="http://schemas.microsoft.com/office/drawing/2014/main" val="10000"/>
-                  </a:ext>
-                </a:extLst>
               </a:tr>
               <a:tr h="217170">
                 <a:tc>
@@ -9279,11 +8462,6 @@
                     </a:solidFill>
                   </a:tcPr>
                 </a:tc>
-                <a:extLst>
-                  <a:ext uri="{0D108BD9-81ED-4DB2-BD59-A6C34878D82A}">
-                    <a16:rowId xmlns:a16="http://schemas.microsoft.com/office/drawing/2014/main" val="10001"/>
-                  </a:ext>
-                </a:extLst>
               </a:tr>
               <a:tr h="217170">
                 <a:tc>
@@ -9352,11 +8530,6 @@
                     </a:solidFill>
                   </a:tcPr>
                 </a:tc>
-                <a:extLst>
-                  <a:ext uri="{0D108BD9-81ED-4DB2-BD59-A6C34878D82A}">
-                    <a16:rowId xmlns:a16="http://schemas.microsoft.com/office/drawing/2014/main" val="10002"/>
-                  </a:ext>
-                </a:extLst>
               </a:tr>
               <a:tr h="217170">
                 <a:tc>
@@ -9425,11 +8598,6 @@
                     </a:solidFill>
                   </a:tcPr>
                 </a:tc>
-                <a:extLst>
-                  <a:ext uri="{0D108BD9-81ED-4DB2-BD59-A6C34878D82A}">
-                    <a16:rowId xmlns:a16="http://schemas.microsoft.com/office/drawing/2014/main" val="10003"/>
-                  </a:ext>
-                </a:extLst>
               </a:tr>
               <a:tr h="217170">
                 <a:tc>
@@ -9498,11 +8666,6 @@
                     </a:solidFill>
                   </a:tcPr>
                 </a:tc>
-                <a:extLst>
-                  <a:ext uri="{0D108BD9-81ED-4DB2-BD59-A6C34878D82A}">
-                    <a16:rowId xmlns:a16="http://schemas.microsoft.com/office/drawing/2014/main" val="10004"/>
-                  </a:ext>
-                </a:extLst>
               </a:tr>
               <a:tr h="217170">
                 <a:tc>
@@ -9571,11 +8734,6 @@
                     </a:solidFill>
                   </a:tcPr>
                 </a:tc>
-                <a:extLst>
-                  <a:ext uri="{0D108BD9-81ED-4DB2-BD59-A6C34878D82A}">
-                    <a16:rowId xmlns:a16="http://schemas.microsoft.com/office/drawing/2014/main" val="10005"/>
-                  </a:ext>
-                </a:extLst>
               </a:tr>
               <a:tr h="217170">
                 <a:tc>
@@ -9644,11 +8802,6 @@
                     </a:solidFill>
                   </a:tcPr>
                 </a:tc>
-                <a:extLst>
-                  <a:ext uri="{0D108BD9-81ED-4DB2-BD59-A6C34878D82A}">
-                    <a16:rowId xmlns:a16="http://schemas.microsoft.com/office/drawing/2014/main" val="10006"/>
-                  </a:ext>
-                </a:extLst>
               </a:tr>
               <a:tr h="217170">
                 <a:tc>
@@ -9717,11 +8870,6 @@
                     </a:solidFill>
                   </a:tcPr>
                 </a:tc>
-                <a:extLst>
-                  <a:ext uri="{0D108BD9-81ED-4DB2-BD59-A6C34878D82A}">
-                    <a16:rowId xmlns:a16="http://schemas.microsoft.com/office/drawing/2014/main" val="10007"/>
-                  </a:ext>
-                </a:extLst>
               </a:tr>
             </a:tbl>
           </a:graphicData>
@@ -9735,8 +8883,8 @@
         </p:nvSpPr>
         <p:spPr>
           <a:xfrm>
-            <a:off x="274320" y="3015452"/>
-            <a:ext cx="8595360" cy="1200329"/>
+            <a:off x="274320" y="2743200"/>
+            <a:ext cx="8595360" cy="2103120"/>
           </a:xfrm>
           <a:prstGeom prst="rect">
             <a:avLst/>
@@ -9753,7 +8901,7 @@
           <a:p>
             <a:pPr algn="l"/>
             <a:r>
-              <a:rPr sz="1100" b="1" i="0" dirty="0">
+              <a:rPr sz="1100" b="1" i="0">
                 <a:solidFill>
                   <a:srgbClr val="202020"/>
                 </a:solidFill>
@@ -9763,327 +8911,65 @@
           </a:p>
           <a:p>
             <a:pPr algn="l"/>
-            <a:endParaRPr sz="1100" b="1" i="0" dirty="0">
-              <a:solidFill>
-                <a:srgbClr val="202020"/>
-              </a:solidFill>
-            </a:endParaRPr>
-          </a:p>
-          <a:p>
-            <a:pPr algn="l"/>
-            <a:r>
-              <a:rPr sz="1000" b="0" i="0" dirty="0">
-                <a:solidFill>
-                  <a:srgbClr val="202020"/>
-                </a:solidFill>
-              </a:rPr>
-              <a:t>1. Face detection → crop </a:t>
-            </a:r>
-            <a:r>
-              <a:rPr sz="1000" b="0" i="0" dirty="0" err="1">
-                <a:solidFill>
-                  <a:srgbClr val="202020"/>
-                </a:solidFill>
-              </a:rPr>
-              <a:t>wajah</a:t>
-            </a:r>
-            <a:r>
-              <a:rPr sz="1000" b="0" i="0" dirty="0">
-                <a:solidFill>
-                  <a:srgbClr val="202020"/>
-                </a:solidFill>
-              </a:rPr>
-              <a:t> → resize 224×224 RGB (</a:t>
-            </a:r>
-            <a:r>
-              <a:rPr sz="1000" b="0" i="0" dirty="0" err="1">
-                <a:solidFill>
-                  <a:srgbClr val="202020"/>
-                </a:solidFill>
-              </a:rPr>
-              <a:t>untuk</a:t>
-            </a:r>
-            <a:r>
-              <a:rPr sz="1000" b="0" i="0" dirty="0">
-                <a:solidFill>
-                  <a:srgbClr val="202020"/>
-                </a:solidFill>
-              </a:rPr>
-              <a:t> CNN branch).</a:t>
-            </a:r>
-          </a:p>
-          <a:p>
-            <a:pPr algn="l"/>
-            <a:r>
-              <a:rPr sz="1000" b="0" i="0" dirty="0">
-                <a:solidFill>
-                  <a:srgbClr val="202020"/>
-                </a:solidFill>
-              </a:rPr>
-              <a:t>2. Facial landmark extraction via </a:t>
-            </a:r>
-            <a:r>
-              <a:rPr sz="1000" b="0" i="0" dirty="0" err="1">
-                <a:solidFill>
-                  <a:srgbClr val="202020"/>
-                </a:solidFill>
-              </a:rPr>
-              <a:t>MediaPipe</a:t>
-            </a:r>
-            <a:r>
-              <a:rPr sz="1000" b="0" i="0" dirty="0">
-                <a:solidFill>
-                  <a:srgbClr val="202020"/>
-                </a:solidFill>
-              </a:rPr>
-              <a:t> (478 </a:t>
-            </a:r>
-            <a:r>
-              <a:rPr sz="1000" b="0" i="0" dirty="0" err="1">
-                <a:solidFill>
-                  <a:srgbClr val="202020"/>
-                </a:solidFill>
-              </a:rPr>
-              <a:t>titik</a:t>
-            </a:r>
-            <a:r>
-              <a:rPr sz="1000" b="0" i="0" dirty="0">
-                <a:solidFill>
-                  <a:srgbClr val="202020"/>
-                </a:solidFill>
-              </a:rPr>
-              <a:t> → subset 68 </a:t>
-            </a:r>
-            <a:r>
-              <a:rPr sz="1000" b="0" i="0" dirty="0" err="1">
-                <a:solidFill>
-                  <a:srgbClr val="202020"/>
-                </a:solidFill>
-              </a:rPr>
-              <a:t>klasik</a:t>
-            </a:r>
-            <a:r>
-              <a:rPr sz="1000" b="0" i="0" dirty="0">
-                <a:solidFill>
-                  <a:srgbClr val="202020"/>
-                </a:solidFill>
-              </a:rPr>
-              <a:t> = 136 </a:t>
-            </a:r>
-            <a:r>
-              <a:rPr sz="1000" b="0" i="0" dirty="0" err="1">
-                <a:solidFill>
-                  <a:srgbClr val="202020"/>
-                </a:solidFill>
-              </a:rPr>
-              <a:t>koordinat</a:t>
-            </a:r>
-            <a:r>
-              <a:rPr sz="1000" b="0" i="0" dirty="0">
-                <a:solidFill>
-                  <a:srgbClr val="202020"/>
-                </a:solidFill>
-              </a:rPr>
-              <a:t>).</a:t>
-            </a:r>
-          </a:p>
-          <a:p>
-            <a:pPr algn="l"/>
-            <a:r>
-              <a:rPr sz="1000" b="0" i="0" dirty="0">
-                <a:solidFill>
-                  <a:srgbClr val="202020"/>
-                </a:solidFill>
-              </a:rPr>
-              <a:t>3. </a:t>
-            </a:r>
-            <a:r>
-              <a:rPr sz="1000" b="0" i="0" dirty="0" err="1">
-                <a:solidFill>
-                  <a:srgbClr val="202020"/>
-                </a:solidFill>
-              </a:rPr>
-              <a:t>Normalisasi</a:t>
-            </a:r>
-            <a:r>
-              <a:rPr sz="1000" b="0" i="0" dirty="0">
-                <a:solidFill>
-                  <a:srgbClr val="202020"/>
-                </a:solidFill>
-              </a:rPr>
-              <a:t>: </a:t>
-            </a:r>
-            <a:r>
-              <a:rPr sz="1000" b="0" i="0" dirty="0" err="1">
-                <a:solidFill>
-                  <a:srgbClr val="202020"/>
-                </a:solidFill>
-              </a:rPr>
-              <a:t>piksel</a:t>
-            </a:r>
-            <a:r>
-              <a:rPr sz="1000" b="0" i="0" dirty="0">
-                <a:solidFill>
-                  <a:srgbClr val="202020"/>
-                </a:solidFill>
-              </a:rPr>
-              <a:t> [0,1], landmark normalized </a:t>
-            </a:r>
-            <a:r>
-              <a:rPr sz="1000" b="0" i="0" dirty="0" err="1">
-                <a:solidFill>
-                  <a:srgbClr val="202020"/>
-                </a:solidFill>
-              </a:rPr>
-              <a:t>ke</a:t>
-            </a:r>
-            <a:r>
-              <a:rPr sz="1000" b="0" i="0" dirty="0">
-                <a:solidFill>
-                  <a:srgbClr val="202020"/>
-                </a:solidFill>
-              </a:rPr>
-              <a:t> frame (agar invariant </a:t>
-            </a:r>
-            <a:r>
-              <a:rPr sz="1000" b="0" i="0" dirty="0" err="1">
-                <a:solidFill>
-                  <a:srgbClr val="202020"/>
-                </a:solidFill>
-              </a:rPr>
-              <a:t>terhadap</a:t>
-            </a:r>
-            <a:r>
-              <a:rPr sz="1000" b="0" i="0" dirty="0">
-                <a:solidFill>
-                  <a:srgbClr val="202020"/>
-                </a:solidFill>
-              </a:rPr>
-              <a:t> </a:t>
-            </a:r>
-            <a:r>
-              <a:rPr sz="1000" b="0" i="0" dirty="0" err="1">
-                <a:solidFill>
-                  <a:srgbClr val="202020"/>
-                </a:solidFill>
-              </a:rPr>
-              <a:t>resolusi</a:t>
-            </a:r>
-            <a:r>
-              <a:rPr sz="1000" b="0" i="0" dirty="0">
-                <a:solidFill>
-                  <a:srgbClr val="202020"/>
-                </a:solidFill>
-              </a:rPr>
-              <a:t>).</a:t>
-            </a:r>
-          </a:p>
-          <a:p>
-            <a:pPr algn="l"/>
-            <a:r>
-              <a:rPr sz="1000" b="0" i="0" dirty="0">
-                <a:solidFill>
-                  <a:srgbClr val="202020"/>
-                </a:solidFill>
-              </a:rPr>
-              <a:t>4. Remap 4-class </a:t>
-            </a:r>
-            <a:r>
-              <a:rPr sz="1000" b="0" i="0" dirty="0" err="1">
-                <a:solidFill>
-                  <a:srgbClr val="202020"/>
-                </a:solidFill>
-              </a:rPr>
-              <a:t>opsional</a:t>
-            </a:r>
-            <a:r>
-              <a:rPr sz="1000" b="0" i="0" dirty="0">
-                <a:solidFill>
-                  <a:srgbClr val="202020"/>
-                </a:solidFill>
-              </a:rPr>
-              <a:t>: neutral / happy / sad / negative (</a:t>
-            </a:r>
-            <a:r>
-              <a:rPr sz="1000" b="0" i="0" dirty="0" err="1">
-                <a:solidFill>
-                  <a:srgbClr val="202020"/>
-                </a:solidFill>
-              </a:rPr>
-              <a:t>gabung</a:t>
-            </a:r>
-            <a:r>
-              <a:rPr sz="1000" b="0" i="0" dirty="0">
-                <a:solidFill>
-                  <a:srgbClr val="202020"/>
-                </a:solidFill>
-              </a:rPr>
-              <a:t> </a:t>
-            </a:r>
-            <a:r>
-              <a:rPr sz="1000" b="0" i="0" dirty="0" err="1">
-                <a:solidFill>
-                  <a:srgbClr val="202020"/>
-                </a:solidFill>
-              </a:rPr>
-              <a:t>angry+fearful+disgusted+surprised</a:t>
-            </a:r>
-            <a:r>
-              <a:rPr sz="1000" b="0" i="0" dirty="0">
-                <a:solidFill>
-                  <a:srgbClr val="202020"/>
-                </a:solidFill>
-              </a:rPr>
-              <a:t>).</a:t>
-            </a:r>
-          </a:p>
-          <a:p>
-            <a:pPr algn="l"/>
-            <a:r>
-              <a:rPr sz="1000" b="0" i="0" dirty="0">
-                <a:solidFill>
-                  <a:srgbClr val="202020"/>
-                </a:solidFill>
-              </a:rPr>
-              <a:t>5. Split user-wise: 29 user train / 3 user </a:t>
-            </a:r>
-            <a:r>
-              <a:rPr sz="1000" b="0" i="0" dirty="0" err="1">
-                <a:solidFill>
-                  <a:srgbClr val="202020"/>
-                </a:solidFill>
-              </a:rPr>
-              <a:t>val</a:t>
-            </a:r>
-            <a:r>
-              <a:rPr sz="1000" b="0" i="0" dirty="0">
-                <a:solidFill>
-                  <a:srgbClr val="202020"/>
-                </a:solidFill>
-              </a:rPr>
-              <a:t> / 5 user test → </a:t>
-            </a:r>
-            <a:r>
-              <a:rPr sz="1000" b="0" i="0" dirty="0" err="1">
-                <a:solidFill>
-                  <a:srgbClr val="202020"/>
-                </a:solidFill>
-              </a:rPr>
-              <a:t>mencegah</a:t>
-            </a:r>
-            <a:r>
-              <a:rPr sz="1000" b="0" i="0" dirty="0">
-                <a:solidFill>
-                  <a:srgbClr val="202020"/>
-                </a:solidFill>
-              </a:rPr>
-              <a:t> identity-leakage.</a:t>
-            </a:r>
-            <a:endParaRPr lang="en-US" sz="1000" b="0" i="0" dirty="0">
-              <a:solidFill>
-                <a:srgbClr val="202020"/>
-              </a:solidFill>
-            </a:endParaRPr>
+            <a:r>
+              <a:rPr sz="300" b="0" i="0"/>
+              <a:t/>
+            </a:r>
+          </a:p>
+          <a:p>
+            <a:pPr algn="l"/>
+            <a:r>
+              <a:rPr sz="1000" b="0" i="0">
+                <a:solidFill>
+                  <a:srgbClr val="202020"/>
+                </a:solidFill>
+              </a:rPr>
+              <a:t>1. Face detection → crop wajah → resize 224×224 RGB (untuk CNN branch).</a:t>
+            </a:r>
+          </a:p>
+          <a:p>
+            <a:pPr algn="l"/>
+            <a:r>
+              <a:rPr sz="1000" b="0" i="0">
+                <a:solidFill>
+                  <a:srgbClr val="202020"/>
+                </a:solidFill>
+              </a:rPr>
+              <a:t>2. Facial landmark extraction via MediaPipe (478 titik → subset 68 klasik = 136 koordinat).</a:t>
+            </a:r>
+          </a:p>
+          <a:p>
+            <a:pPr algn="l"/>
+            <a:r>
+              <a:rPr sz="1000" b="0" i="0">
+                <a:solidFill>
+                  <a:srgbClr val="202020"/>
+                </a:solidFill>
+              </a:rPr>
+              <a:t>3. Normalisasi: piksel [0,1], landmark normalized ke frame (agar invariant terhadap resolusi).</a:t>
+            </a:r>
+          </a:p>
+          <a:p>
+            <a:pPr algn="l"/>
+            <a:r>
+              <a:rPr sz="1000" b="0" i="0">
+                <a:solidFill>
+                  <a:srgbClr val="202020"/>
+                </a:solidFill>
+              </a:rPr>
+              <a:t>4. Remap 4-class opsional: neutral / happy / sad / negative (gabung angry+fearful+disgusted+surprised).</a:t>
+            </a:r>
+          </a:p>
+          <a:p>
+            <a:pPr algn="l"/>
+            <a:r>
+              <a:rPr sz="1000" b="0" i="0">
+                <a:solidFill>
+                  <a:srgbClr val="202020"/>
+                </a:solidFill>
+              </a:rPr>
+              <a:t>5. Split user-wise: 29 user train / 3 user val / 5 user test → mencegah identity-leakage.</a:t>
+            </a:r>
           </a:p>
         </p:txBody>
       </p:sp>
@@ -10096,7 +8982,7 @@
 </file>
 
 <file path=ppt/slides/slide8.xml><?xml version="1.0" encoding="utf-8"?>
-<p:sld xmlns:a="http://schemas.openxmlformats.org/drawingml/2006/main" xmlns:r="http://schemas.openxmlformats.org/officeDocument/2006/relationships" xmlns:p="http://schemas.openxmlformats.org/presentationml/2006/main">
+<p:sld xmlns:a="http://schemas.openxmlformats.org/drawingml/2006/main" xmlns:p="http://schemas.openxmlformats.org/presentationml/2006/main" xmlns:r="http://schemas.openxmlformats.org/officeDocument/2006/relationships">
   <p:cSld>
     <p:spTree>
       <p:nvGrpSpPr>
@@ -10104,14 +8990,7 @@
         <p:cNvGrpSpPr/>
         <p:nvPr/>
       </p:nvGrpSpPr>
-      <p:grpSpPr>
-        <a:xfrm>
-          <a:off x="0" y="0"/>
-          <a:ext cx="0" cy="0"/>
-          <a:chOff x="0" y="0"/>
-          <a:chExt cx="0" cy="0"/>
-        </a:xfrm>
-      </p:grpSpPr>
+      <p:grpSpPr/>
       <p:sp>
         <p:nvSpPr>
           <p:cNvPr id="2" name="TextBox 1"/>
@@ -10156,50 +9035,19 @@
         </p:nvGraphicFramePr>
         <p:xfrm>
           <a:off x="274320" y="777240"/>
-          <a:ext cx="8595360" cy="1703832"/>
+          <a:ext cx="8595358" cy="1828800"/>
         </p:xfrm>
         <a:graphic>
           <a:graphicData uri="http://schemas.openxmlformats.org/drawingml/2006/table">
             <a:tbl>
               <a:tblPr firstRow="1" bandRow="1"/>
               <a:tblGrid>
-                <a:gridCol w="1645920">
-                  <a:extLst>
-                    <a:ext uri="{9D8B030D-6E8A-4147-A177-3AD203B41FA5}">
-                      <a16:colId xmlns:a16="http://schemas.microsoft.com/office/drawing/2014/main" val="20000"/>
-                    </a:ext>
-                  </a:extLst>
-                </a:gridCol>
-                <a:gridCol w="1828800">
-                  <a:extLst>
-                    <a:ext uri="{9D8B030D-6E8A-4147-A177-3AD203B41FA5}">
-                      <a16:colId xmlns:a16="http://schemas.microsoft.com/office/drawing/2014/main" val="20001"/>
-                    </a:ext>
-                  </a:extLst>
-                </a:gridCol>
-                <a:gridCol w="2103120">
-                  <a:extLst>
-                    <a:ext uri="{9D8B030D-6E8A-4147-A177-3AD203B41FA5}">
-                      <a16:colId xmlns:a16="http://schemas.microsoft.com/office/drawing/2014/main" val="20002"/>
-                    </a:ext>
-                  </a:extLst>
-                </a:gridCol>
-                <a:gridCol w="1371600">
-                  <a:extLst>
-                    <a:ext uri="{9D8B030D-6E8A-4147-A177-3AD203B41FA5}">
-                      <a16:colId xmlns:a16="http://schemas.microsoft.com/office/drawing/2014/main" val="20003"/>
-                    </a:ext>
-                  </a:extLst>
-                </a:gridCol>
-                <a:gridCol w="1645920">
-                  <a:extLst>
-                    <a:ext uri="{9D8B030D-6E8A-4147-A177-3AD203B41FA5}">
-                      <a16:colId xmlns:a16="http://schemas.microsoft.com/office/drawing/2014/main" val="20004"/>
-                    </a:ext>
-                  </a:extLst>
-                </a:gridCol>
+                <a:gridCol w="1599136"/>
+                <a:gridCol w="2198813"/>
+                <a:gridCol w="1799028"/>
+                <a:gridCol w="2998381"/>
               </a:tblGrid>
-              <a:tr h="338328">
+              <a:tr h="304800">
                 <a:tc>
                   <a:txBody>
                     <a:bodyPr/>
@@ -10256,7 +9104,7 @@
                             <a:srgbClr val="FFFFFF"/>
                           </a:solidFill>
                         </a:rPr>
-                        <a:t>Backbone</a:t>
+                        <a:t>Fusion Point</a:t>
                       </a:r>
                     </a:p>
                   </a:txBody>
@@ -10278,7 +9126,7 @@
                             <a:srgbClr val="FFFFFF"/>
                           </a:solidFill>
                         </a:rPr>
-                        <a:t>Fusion Point</a:t>
+                        <a:t>Keterangan</a:t>
                       </a:r>
                     </a:p>
                   </a:txBody>
@@ -10288,35 +9136,8 @@
                     </a:solidFill>
                   </a:tcPr>
                 </a:tc>
-                <a:tc>
-                  <a:txBody>
-                    <a:bodyPr/>
-                    <a:lstStyle/>
-                    <a:p>
-                      <a:pPr algn="ctr"/>
-                      <a:r>
-                        <a:rPr sz="900" b="1">
-                          <a:solidFill>
-                            <a:srgbClr val="FFFFFF"/>
-                          </a:solidFill>
-                        </a:rPr>
-                        <a:t>Keterangan</a:t>
-                      </a:r>
-                    </a:p>
-                  </a:txBody>
-                  <a:tcPr>
-                    <a:solidFill>
-                      <a:srgbClr val="1A73E8"/>
-                    </a:solidFill>
-                  </a:tcPr>
-                </a:tc>
-                <a:extLst>
-                  <a:ext uri="{0D108BD9-81ED-4DB2-BD59-A6C34878D82A}">
-                    <a16:rowId xmlns:a16="http://schemas.microsoft.com/office/drawing/2014/main" val="10000"/>
-                  </a:ext>
-                </a:extLst>
               </a:tr>
-              <a:tr h="338328">
+              <a:tr h="304800">
                 <a:tc>
                   <a:txBody>
                     <a:bodyPr/>
@@ -10324,7 +9145,7 @@
                     <a:p>
                       <a:pPr algn="l"/>
                       <a:r>
-                        <a:rPr sz="850" b="1">
+                        <a:rPr sz="800" b="1">
                           <a:solidFill>
                             <a:srgbClr val="202020"/>
                           </a:solidFill>
@@ -10346,12 +9167,12 @@
                     <a:p>
                       <a:pPr algn="ctr"/>
                       <a:r>
-                        <a:rPr sz="850" b="0">
-                          <a:solidFill>
-                            <a:srgbClr val="202020"/>
-                          </a:solidFill>
-                        </a:rPr>
-                        <a:t>Citra wajah 224×224</a:t>
+                        <a:rPr sz="800" b="0">
+                          <a:solidFill>
+                            <a:srgbClr val="202020"/>
+                          </a:solidFill>
+                        </a:rPr>
+                        <a:t>Citra 224×224×3</a:t>
                       </a:r>
                     </a:p>
                   </a:txBody>
@@ -10368,12 +9189,12 @@
                     <a:p>
                       <a:pPr algn="ctr"/>
                       <a:r>
-                        <a:rPr sz="850" b="0">
-                          <a:solidFill>
-                            <a:srgbClr val="202020"/>
-                          </a:solidFill>
-                        </a:rPr>
-                        <a:t>Custom Conv (scratch) / ResNet18 (TL)</a:t>
+                        <a:rPr sz="800" b="0">
+                          <a:solidFill>
+                            <a:srgbClr val="202020"/>
+                          </a:solidFill>
+                        </a:rPr>
+                        <a:t>—</a:t>
                       </a:r>
                     </a:p>
                   </a:txBody>
@@ -10390,7 +9211,75 @@
                     <a:p>
                       <a:pPr algn="ctr"/>
                       <a:r>
-                        <a:rPr sz="850" b="0">
+                        <a:rPr sz="800" b="0">
+                          <a:solidFill>
+                            <a:srgbClr val="202020"/>
+                          </a:solidFill>
+                        </a:rPr>
+                        <a:t>Single modal: visual</a:t>
+                      </a:r>
+                    </a:p>
+                  </a:txBody>
+                  <a:tcPr>
+                    <a:solidFill>
+                      <a:srgbClr val="E8F0FE"/>
+                    </a:solidFill>
+                  </a:tcPr>
+                </a:tc>
+              </a:tr>
+              <a:tr h="304800">
+                <a:tc>
+                  <a:txBody>
+                    <a:bodyPr/>
+                    <a:lstStyle/>
+                    <a:p>
+                      <a:pPr algn="l"/>
+                      <a:r>
+                        <a:rPr sz="800" b="1">
+                          <a:solidFill>
+                            <a:srgbClr val="202020"/>
+                          </a:solidFill>
+                        </a:rPr>
+                        <a:t>FCNN</a:t>
+                      </a:r>
+                    </a:p>
+                  </a:txBody>
+                  <a:tcPr>
+                    <a:solidFill>
+                      <a:srgbClr val="FFFFFF"/>
+                    </a:solidFill>
+                  </a:tcPr>
+                </a:tc>
+                <a:tc>
+                  <a:txBody>
+                    <a:bodyPr/>
+                    <a:lstStyle/>
+                    <a:p>
+                      <a:pPr algn="ctr"/>
+                      <a:r>
+                        <a:rPr sz="800" b="0">
+                          <a:solidFill>
+                            <a:srgbClr val="202020"/>
+                          </a:solidFill>
+                        </a:rPr>
+                        <a:t>Landmark 136-dim</a:t>
+                      </a:r>
+                    </a:p>
+                  </a:txBody>
+                  <a:tcPr>
+                    <a:solidFill>
+                      <a:srgbClr val="FFFFFF"/>
+                    </a:solidFill>
+                  </a:tcPr>
+                </a:tc>
+                <a:tc>
+                  <a:txBody>
+                    <a:bodyPr/>
+                    <a:lstStyle/>
+                    <a:p>
+                      <a:pPr algn="ctr"/>
+                      <a:r>
+                        <a:rPr sz="800" b="0">
                           <a:solidFill>
                             <a:srgbClr val="202020"/>
                           </a:solidFill>
@@ -10401,6 +9290,52 @@
                   </a:txBody>
                   <a:tcPr>
                     <a:solidFill>
+                      <a:srgbClr val="FFFFFF"/>
+                    </a:solidFill>
+                  </a:tcPr>
+                </a:tc>
+                <a:tc>
+                  <a:txBody>
+                    <a:bodyPr/>
+                    <a:lstStyle/>
+                    <a:p>
+                      <a:pPr algn="ctr"/>
+                      <a:r>
+                        <a:rPr sz="800" b="0">
+                          <a:solidFill>
+                            <a:srgbClr val="202020"/>
+                          </a:solidFill>
+                        </a:rPr>
+                        <a:t>Single modal: geometric</a:t>
+                      </a:r>
+                    </a:p>
+                  </a:txBody>
+                  <a:tcPr>
+                    <a:solidFill>
+                      <a:srgbClr val="FFFFFF"/>
+                    </a:solidFill>
+                  </a:tcPr>
+                </a:tc>
+              </a:tr>
+              <a:tr h="304800">
+                <a:tc>
+                  <a:txBody>
+                    <a:bodyPr/>
+                    <a:lstStyle/>
+                    <a:p>
+                      <a:pPr algn="l"/>
+                      <a:r>
+                        <a:rPr sz="800" b="1">
+                          <a:solidFill>
+                            <a:srgbClr val="202020"/>
+                          </a:solidFill>
+                        </a:rPr>
+                        <a:t>Early Fusion</a:t>
+                      </a:r>
+                    </a:p>
+                  </a:txBody>
+                  <a:tcPr>
+                    <a:solidFill>
                       <a:srgbClr val="E8F0FE"/>
                     </a:solidFill>
                   </a:tcPr>
@@ -10412,12 +9347,12 @@
                     <a:p>
                       <a:pPr algn="ctr"/>
                       <a:r>
-                        <a:rPr sz="850" b="0">
-                          <a:solidFill>
-                            <a:srgbClr val="202020"/>
-                          </a:solidFill>
-                        </a:rPr>
-                        <a:t>Single modal: visual</a:t>
+                        <a:rPr sz="800" b="0">
+                          <a:solidFill>
+                            <a:srgbClr val="202020"/>
+                          </a:solidFill>
+                        </a:rPr>
+                        <a:t>Citra + heatmap (224×224×4)</a:t>
                       </a:r>
                     </a:p>
                   </a:txBody>
@@ -10427,13 +9362,52 @@
                     </a:solidFill>
                   </a:tcPr>
                 </a:tc>
-                <a:extLst>
-                  <a:ext uri="{0D108BD9-81ED-4DB2-BD59-A6C34878D82A}">
-                    <a16:rowId xmlns:a16="http://schemas.microsoft.com/office/drawing/2014/main" val="10001"/>
-                  </a:ext>
-                </a:extLst>
+                <a:tc>
+                  <a:txBody>
+                    <a:bodyPr/>
+                    <a:lstStyle/>
+                    <a:p>
+                      <a:pPr algn="ctr"/>
+                      <a:r>
+                        <a:rPr sz="800" b="0">
+                          <a:solidFill>
+                            <a:srgbClr val="202020"/>
+                          </a:solidFill>
+                        </a:rPr>
+                        <a:t>Input level (0%)</a:t>
+                      </a:r>
+                    </a:p>
+                  </a:txBody>
+                  <a:tcPr>
+                    <a:solidFill>
+                      <a:srgbClr val="E8F0FE"/>
+                    </a:solidFill>
+                  </a:tcPr>
+                </a:tc>
+                <a:tc>
+                  <a:txBody>
+                    <a:bodyPr/>
+                    <a:lstStyle/>
+                    <a:p>
+                      <a:pPr algn="ctr"/>
+                      <a:r>
+                        <a:rPr sz="800" b="0">
+                          <a:solidFill>
+                            <a:srgbClr val="202020"/>
+                          </a:solidFill>
+                        </a:rPr>
+                        <a:t>Landmark Gaussian heatmap sbg channel ke-4</a:t>
+                      </a:r>
+                    </a:p>
+                  </a:txBody>
+                  <a:tcPr>
+                    <a:solidFill>
+                      <a:srgbClr val="E8F0FE"/>
+                    </a:solidFill>
+                  </a:tcPr>
+                </a:tc>
               </a:tr>
-              <a:tr h="338328">
+              <a:tr h="304800">
                 <a:tc>
                   <a:txBody>
                     <a:bodyPr/>
@@ -10441,12 +9415,12 @@
                     <a:p>
                       <a:pPr algn="l"/>
                       <a:r>
-                        <a:rPr sz="850" b="1">
-                          <a:solidFill>
-                            <a:srgbClr val="202020"/>
-                          </a:solidFill>
-                        </a:rPr>
-                        <a:t>FCNN</a:t>
+                        <a:rPr sz="800" b="1">
+                          <a:solidFill>
+                            <a:srgbClr val="202020"/>
+                          </a:solidFill>
+                        </a:rPr>
+                        <a:t>Intermediate Fusion</a:t>
                       </a:r>
                     </a:p>
                   </a:txBody>
@@ -10463,12 +9437,12 @@
                     <a:p>
                       <a:pPr algn="ctr"/>
                       <a:r>
-                        <a:rPr sz="850" b="0">
-                          <a:solidFill>
-                            <a:srgbClr val="202020"/>
-                          </a:solidFill>
-                        </a:rPr>
-                        <a:t>Landmark 136-dim</a:t>
+                        <a:rPr sz="800" b="0">
+                          <a:solidFill>
+                            <a:srgbClr val="202020"/>
+                          </a:solidFill>
+                        </a:rPr>
+                        <a:t>Citra + Landmark</a:t>
                       </a:r>
                     </a:p>
                   </a:txBody>
@@ -10485,12 +9459,12 @@
                     <a:p>
                       <a:pPr algn="ctr"/>
                       <a:r>
-                        <a:rPr sz="850" b="0">
-                          <a:solidFill>
-                            <a:srgbClr val="202020"/>
-                          </a:solidFill>
-                        </a:rPr>
-                        <a:t>4 FC layers (64-128-64-32)</a:t>
+                        <a:rPr sz="800" b="0">
+                          <a:solidFill>
+                            <a:srgbClr val="202020"/>
+                          </a:solidFill>
+                        </a:rPr>
+                        <a:t>Feature level (50%)</a:t>
                       </a:r>
                     </a:p>
                   </a:txBody>
@@ -10507,12 +9481,12 @@
                     <a:p>
                       <a:pPr algn="ctr"/>
                       <a:r>
-                        <a:rPr sz="850" b="0">
-                          <a:solidFill>
-                            <a:srgbClr val="202020"/>
-                          </a:solidFill>
-                        </a:rPr>
-                        <a:t>—</a:t>
+                        <a:rPr sz="800" b="0">
+                          <a:solidFill>
+                            <a:srgbClr val="202020"/>
+                          </a:solidFill>
+                        </a:rPr>
+                        <a:t>CNN+FCNN concat di hidden layer</a:t>
                       </a:r>
                     </a:p>
                   </a:txBody>
@@ -10522,35 +9496,8 @@
                     </a:solidFill>
                   </a:tcPr>
                 </a:tc>
-                <a:tc>
-                  <a:txBody>
-                    <a:bodyPr/>
-                    <a:lstStyle/>
-                    <a:p>
-                      <a:pPr algn="ctr"/>
-                      <a:r>
-                        <a:rPr sz="850" b="0">
-                          <a:solidFill>
-                            <a:srgbClr val="202020"/>
-                          </a:solidFill>
-                        </a:rPr>
-                        <a:t>Single modal: geometric</a:t>
-                      </a:r>
-                    </a:p>
-                  </a:txBody>
-                  <a:tcPr>
-                    <a:solidFill>
-                      <a:srgbClr val="FFFFFF"/>
-                    </a:solidFill>
-                  </a:tcPr>
-                </a:tc>
-                <a:extLst>
-                  <a:ext uri="{0D108BD9-81ED-4DB2-BD59-A6C34878D82A}">
-                    <a16:rowId xmlns:a16="http://schemas.microsoft.com/office/drawing/2014/main" val="10002"/>
-                  </a:ext>
-                </a:extLst>
               </a:tr>
-              <a:tr h="338328">
+              <a:tr h="304800">
                 <a:tc>
                   <a:txBody>
                     <a:bodyPr/>
@@ -10558,12 +9505,12 @@
                     <a:p>
                       <a:pPr algn="l"/>
                       <a:r>
-                        <a:rPr sz="850" b="1">
-                          <a:solidFill>
-                            <a:srgbClr val="202020"/>
-                          </a:solidFill>
-                        </a:rPr>
-                        <a:t>Intermediate Fusion</a:t>
+                        <a:rPr sz="800" b="1">
+                          <a:solidFill>
+                            <a:srgbClr val="202020"/>
+                          </a:solidFill>
+                        </a:rPr>
+                        <a:t>Late Fusion</a:t>
                       </a:r>
                     </a:p>
                   </a:txBody>
@@ -10580,7 +9527,7 @@
                     <a:p>
                       <a:pPr algn="ctr"/>
                       <a:r>
-                        <a:rPr sz="850" b="0">
+                        <a:rPr sz="800" b="0">
                           <a:solidFill>
                             <a:srgbClr val="202020"/>
                           </a:solidFill>
@@ -10602,12 +9549,12 @@
                     <a:p>
                       <a:pPr algn="ctr"/>
                       <a:r>
-                        <a:rPr sz="850" b="0">
-                          <a:solidFill>
-                            <a:srgbClr val="202020"/>
-                          </a:solidFill>
-                        </a:rPr>
-                        <a:t>CNN + FCNN (feat concat di hidden)</a:t>
+                        <a:rPr sz="800" b="0">
+                          <a:solidFill>
+                            <a:srgbClr val="202020"/>
+                          </a:solidFill>
+                        </a:rPr>
+                        <a:t>Decision level (95%)</a:t>
                       </a:r>
                     </a:p>
                   </a:txBody>
@@ -10624,12 +9571,12 @@
                     <a:p>
                       <a:pPr algn="ctr"/>
                       <a:r>
-                        <a:rPr sz="850" b="0">
-                          <a:solidFill>
-                            <a:srgbClr val="202020"/>
-                          </a:solidFill>
-                        </a:rPr>
-                        <a:t>After feat extraction</a:t>
+                        <a:rPr sz="800" b="0">
+                          <a:solidFill>
+                            <a:srgbClr val="202020"/>
+                          </a:solidFill>
+                        </a:rPr>
+                        <a:t>Softmax averaging 2 model terpisah</a:t>
                       </a:r>
                     </a:p>
                   </a:txBody>
@@ -10639,150 +9586,6 @@
                     </a:solidFill>
                   </a:tcPr>
                 </a:tc>
-                <a:tc>
-                  <a:txBody>
-                    <a:bodyPr/>
-                    <a:lstStyle/>
-                    <a:p>
-                      <a:pPr algn="ctr"/>
-                      <a:r>
-                        <a:rPr sz="850" b="0">
-                          <a:solidFill>
-                            <a:srgbClr val="202020"/>
-                          </a:solidFill>
-                        </a:rPr>
-                        <a:t>Joint optimization end-to-end</a:t>
-                      </a:r>
-                    </a:p>
-                  </a:txBody>
-                  <a:tcPr>
-                    <a:solidFill>
-                      <a:srgbClr val="E8F0FE"/>
-                    </a:solidFill>
-                  </a:tcPr>
-                </a:tc>
-                <a:extLst>
-                  <a:ext uri="{0D108BD9-81ED-4DB2-BD59-A6C34878D82A}">
-                    <a16:rowId xmlns:a16="http://schemas.microsoft.com/office/drawing/2014/main" val="10003"/>
-                  </a:ext>
-                </a:extLst>
-              </a:tr>
-              <a:tr h="338328">
-                <a:tc>
-                  <a:txBody>
-                    <a:bodyPr/>
-                    <a:lstStyle/>
-                    <a:p>
-                      <a:pPr algn="l"/>
-                      <a:r>
-                        <a:rPr sz="850" b="1">
-                          <a:solidFill>
-                            <a:srgbClr val="202020"/>
-                          </a:solidFill>
-                        </a:rPr>
-                        <a:t>Late Fusion</a:t>
-                      </a:r>
-                    </a:p>
-                  </a:txBody>
-                  <a:tcPr>
-                    <a:solidFill>
-                      <a:srgbClr val="FFFFFF"/>
-                    </a:solidFill>
-                  </a:tcPr>
-                </a:tc>
-                <a:tc>
-                  <a:txBody>
-                    <a:bodyPr/>
-                    <a:lstStyle/>
-                    <a:p>
-                      <a:pPr algn="ctr"/>
-                      <a:r>
-                        <a:rPr sz="850" b="0">
-                          <a:solidFill>
-                            <a:srgbClr val="202020"/>
-                          </a:solidFill>
-                        </a:rPr>
-                        <a:t>Citra + Landmark</a:t>
-                      </a:r>
-                    </a:p>
-                  </a:txBody>
-                  <a:tcPr>
-                    <a:solidFill>
-                      <a:srgbClr val="FFFFFF"/>
-                    </a:solidFill>
-                  </a:tcPr>
-                </a:tc>
-                <a:tc>
-                  <a:txBody>
-                    <a:bodyPr/>
-                    <a:lstStyle/>
-                    <a:p>
-                      <a:pPr algn="ctr"/>
-                      <a:r>
-                        <a:rPr sz="850" b="0">
-                          <a:solidFill>
-                            <a:srgbClr val="202020"/>
-                          </a:solidFill>
-                        </a:rPr>
-                        <a:t>CNN + FCNN (softmax averaging)</a:t>
-                      </a:r>
-                    </a:p>
-                  </a:txBody>
-                  <a:tcPr>
-                    <a:solidFill>
-                      <a:srgbClr val="FFFFFF"/>
-                    </a:solidFill>
-                  </a:tcPr>
-                </a:tc>
-                <a:tc>
-                  <a:txBody>
-                    <a:bodyPr/>
-                    <a:lstStyle/>
-                    <a:p>
-                      <a:pPr algn="ctr"/>
-                      <a:r>
-                        <a:rPr sz="850" b="0">
-                          <a:solidFill>
-                            <a:srgbClr val="202020"/>
-                          </a:solidFill>
-                        </a:rPr>
-                        <a:t>After softmax</a:t>
-                      </a:r>
-                    </a:p>
-                  </a:txBody>
-                  <a:tcPr>
-                    <a:solidFill>
-                      <a:srgbClr val="FFFFFF"/>
-                    </a:solidFill>
-                  </a:tcPr>
-                </a:tc>
-                <a:tc>
-                  <a:txBody>
-                    <a:bodyPr/>
-                    <a:lstStyle/>
-                    <a:p>
-                      <a:pPr algn="ctr"/>
-                      <a:r>
-                        <a:rPr sz="850" b="0">
-                          <a:solidFill>
-                            <a:srgbClr val="202020"/>
-                          </a:solidFill>
-                        </a:rPr>
-                        <a:t>Independent training, weighted avg</a:t>
-                      </a:r>
-                    </a:p>
-                  </a:txBody>
-                  <a:tcPr>
-                    <a:solidFill>
-                      <a:srgbClr val="FFFFFF"/>
-                    </a:solidFill>
-                  </a:tcPr>
-                </a:tc>
-                <a:extLst>
-                  <a:ext uri="{0D108BD9-81ED-4DB2-BD59-A6C34878D82A}">
-                    <a16:rowId xmlns:a16="http://schemas.microsoft.com/office/drawing/2014/main" val="10004"/>
-                  </a:ext>
-                </a:extLst>
               </a:tr>
             </a:tbl>
           </a:graphicData>
@@ -10796,8 +9599,8 @@
         </p:nvSpPr>
         <p:spPr>
           <a:xfrm>
-            <a:off x="274320" y="2651760"/>
-            <a:ext cx="8595360" cy="1097280"/>
+            <a:off x="274320" y="2788920"/>
+            <a:ext cx="8595360" cy="1005840"/>
           </a:xfrm>
           <a:prstGeom prst="rect">
             <a:avLst/>
@@ -10824,32 +9627,31 @@
           </a:p>
           <a:p>
             <a:pPr algn="l"/>
-            <a:endParaRPr sz="1100" b="1" i="0">
-              <a:solidFill>
-                <a:srgbClr val="1A73E8"/>
-              </a:solidFill>
-            </a:endParaRPr>
-          </a:p>
-          <a:p>
-            <a:pPr algn="l"/>
-            <a:r>
-              <a:rPr sz="1000" b="0" i="0">
-                <a:solidFill>
-                  <a:srgbClr val="202020"/>
-                </a:solidFill>
-              </a:rPr>
-              <a:t>• ResNet18 pretrained di ImageNet (1000-class) → fine-tune final FC layer ke 7/4 kelas emosi.</a:t>
-            </a:r>
-          </a:p>
-          <a:p>
-            <a:pPr algn="l"/>
-            <a:r>
-              <a:rPr sz="1000" b="0" i="0">
-                <a:solidFill>
-                  <a:srgbClr val="202020"/>
-                </a:solidFill>
-              </a:rPr>
-              <a:t>• Learning rate lebih kecil (5e-5 vs 1e-4 scratch) untuk preserve pretrained features.</a:t>
+            <a:r>
+              <a:rPr sz="200" b="0" i="0"/>
+              <a:t/>
+            </a:r>
+          </a:p>
+          <a:p>
+            <a:pPr algn="l"/>
+            <a:r>
+              <a:rPr sz="950" b="0" i="0">
+                <a:solidFill>
+                  <a:srgbClr val="202020"/>
+                </a:solidFill>
+              </a:rPr>
+              <a:t>• ResNet18 pretrained ImageNet (1000-class) → fine-tune untuk FER</a:t>
+            </a:r>
+          </a:p>
+          <a:p>
+            <a:pPr algn="l"/>
+            <a:r>
+              <a:rPr sz="950" b="0" i="0">
+                <a:solidFill>
+                  <a:srgbClr val="202020"/>
+                </a:solidFill>
+              </a:rPr>
+              <a:t>• Early Fusion TL: first Conv2d dimodifikasi dari 3→4 channel; weight RGB di-copy, weight heatmap diinisialisasi dari mean(RGB)</a:t>
             </a:r>
           </a:p>
         </p:txBody>
@@ -10890,11 +9692,10 @@
           </a:p>
           <a:p>
             <a:pPr algn="l"/>
-            <a:endParaRPr sz="1100" b="1" i="0">
-              <a:solidFill>
-                <a:srgbClr val="202020"/>
-              </a:solidFill>
-            </a:endParaRPr>
+            <a:r>
+              <a:rPr sz="200" b="0" i="0"/>
+              <a:t/>
+            </a:r>
           </a:p>
           <a:p>
             <a:pPr algn="l"/>
@@ -10929,7 +9730,7 @@
 </file>
 
 <file path=ppt/slides/slide9.xml><?xml version="1.0" encoding="utf-8"?>
-<p:sld xmlns:a="http://schemas.openxmlformats.org/drawingml/2006/main" xmlns:r="http://schemas.openxmlformats.org/officeDocument/2006/relationships" xmlns:p="http://schemas.openxmlformats.org/presentationml/2006/main">
+<p:sld xmlns:a="http://schemas.openxmlformats.org/drawingml/2006/main" xmlns:p="http://schemas.openxmlformats.org/presentationml/2006/main" xmlns:r="http://schemas.openxmlformats.org/officeDocument/2006/relationships">
   <p:cSld>
     <p:spTree>
       <p:nvGrpSpPr>
@@ -10937,14 +9738,7 @@
         <p:cNvGrpSpPr/>
         <p:nvPr/>
       </p:nvGrpSpPr>
-      <p:grpSpPr>
-        <a:xfrm>
-          <a:off x="0" y="0"/>
-          <a:ext cx="0" cy="0"/>
-          <a:chOff x="0" y="0"/>
-          <a:chExt cx="0" cy="0"/>
-        </a:xfrm>
-      </p:grpSpPr>
+      <p:grpSpPr/>
       <p:sp>
         <p:nvSpPr>
           <p:cNvPr id="2" name="TextBox 1"/>
@@ -11015,11 +9809,10 @@
           </a:p>
           <a:p>
             <a:pPr algn="l"/>
-            <a:endParaRPr sz="1100" b="1" i="0">
-              <a:solidFill>
-                <a:srgbClr val="1A73E8"/>
-              </a:solidFill>
-            </a:endParaRPr>
+            <a:r>
+              <a:rPr sz="300" b="0" i="0"/>
+              <a:t/>
+            </a:r>
           </a:p>
           <a:p>
             <a:pPr algn="l"/>
@@ -11029,7 +9822,7 @@
                   <a:srgbClr val="202020"/>
                 </a:solidFill>
               </a:rPr>
-              <a:t>4 arsitektur × 2 backbone × 3 skenario × 2 kelas</a:t>
+              <a:t>5 arsitektur × 2 backbone × 3 skenario × 2 kelas</a:t>
             </a:r>
           </a:p>
           <a:p>
@@ -11040,32 +9833,42 @@
                   <a:srgbClr val="0F9D58"/>
                 </a:solidFill>
               </a:rPr>
-              <a:t>= 48 total konfigurasi</a:t>
-            </a:r>
-          </a:p>
-          <a:p>
-            <a:pPr algn="l"/>
-            <a:endParaRPr sz="1000" b="1" i="0">
-              <a:solidFill>
-                <a:srgbClr val="0F9D58"/>
-              </a:solidFill>
-            </a:endParaRPr>
-          </a:p>
-          <a:p>
-            <a:pPr algn="l"/>
-            <a:r>
-              <a:rPr sz="1000" b="0" i="0">
-                <a:solidFill>
-                  <a:srgbClr val="202020"/>
-                </a:solidFill>
-              </a:rPr>
-              <a:t>Arsitektur: CNN, FCNN, Intermediate, Late</a:t>
-            </a:r>
-          </a:p>
-          <a:p>
-            <a:pPr algn="l"/>
-            <a:r>
-              <a:rPr sz="1000" b="0" i="0">
+              <a:t>= 60 total konfigurasi</a:t>
+            </a:r>
+          </a:p>
+          <a:p>
+            <a:pPr algn="l"/>
+            <a:r>
+              <a:rPr sz="400" b="0" i="0"/>
+              <a:t/>
+            </a:r>
+          </a:p>
+          <a:p>
+            <a:pPr algn="l"/>
+            <a:r>
+              <a:rPr sz="1000" b="1" i="0">
+                <a:solidFill>
+                  <a:srgbClr val="202020"/>
+                </a:solidFill>
+              </a:rPr>
+              <a:t>Arsitektur:</a:t>
+            </a:r>
+          </a:p>
+          <a:p>
+            <a:pPr algn="l"/>
+            <a:r>
+              <a:rPr sz="950" b="0" i="0">
+                <a:solidFill>
+                  <a:srgbClr val="202020"/>
+                </a:solidFill>
+              </a:rPr>
+              <a:t>  CNN, FCNN, Early, Intermediate, Late</a:t>
+            </a:r>
+          </a:p>
+          <a:p>
+            <a:pPr algn="l"/>
+            <a:r>
+              <a:rPr sz="950" b="0" i="0">
                 <a:solidFill>
                   <a:srgbClr val="202020"/>
                 </a:solidFill>
@@ -11076,7 +9879,7 @@
           <a:p>
             <a:pPr algn="l"/>
             <a:r>
-              <a:rPr sz="1000" b="0" i="0">
+              <a:rPr sz="950" b="0" i="0">
                 <a:solidFill>
                   <a:srgbClr val="202020"/>
                 </a:solidFill>
@@ -11087,7 +9890,7 @@
           <a:p>
             <a:pPr algn="l"/>
             <a:r>
-              <a:rPr sz="1000" b="0" i="0">
+              <a:rPr sz="950" b="0" i="0">
                 <a:solidFill>
                   <a:srgbClr val="202020"/>
                 </a:solidFill>
@@ -11133,11 +9936,10 @@
           </a:p>
           <a:p>
             <a:pPr algn="l"/>
-            <a:endParaRPr sz="1100" b="1" i="0">
-              <a:solidFill>
-                <a:srgbClr val="202020"/>
-              </a:solidFill>
-            </a:endParaRPr>
+            <a:r>
+              <a:rPr sz="300" b="0" i="0"/>
+              <a:t/>
+            </a:r>
           </a:p>
           <a:p>
             <a:pPr algn="l"/>
@@ -11163,11 +9965,10 @@
           </a:p>
           <a:p>
             <a:pPr algn="l"/>
-            <a:endParaRPr sz="950" b="0" i="0">
-              <a:solidFill>
-                <a:srgbClr val="202020"/>
-              </a:solidFill>
-            </a:endParaRPr>
+            <a:r>
+              <a:rPr sz="200" b="0" i="0"/>
+              <a:t/>
+            </a:r>
           </a:p>
           <a:p>
             <a:pPr algn="l"/>
@@ -11204,11 +10005,10 @@
           </a:p>
           <a:p>
             <a:pPr algn="l"/>
-            <a:endParaRPr sz="950" b="0" i="0">
-              <a:solidFill>
-                <a:srgbClr val="202020"/>
-              </a:solidFill>
-            </a:endParaRPr>
+            <a:r>
+              <a:rPr sz="200" b="0" i="0"/>
+              <a:t/>
+            </a:r>
           </a:p>
           <a:p>
             <a:pPr algn="l"/>
@@ -11270,11 +10070,10 @@
           </a:p>
           <a:p>
             <a:pPr algn="l"/>
-            <a:endParaRPr sz="1100" b="1" i="0">
-              <a:solidFill>
-                <a:srgbClr val="0F9D58"/>
-              </a:solidFill>
-            </a:endParaRPr>
+            <a:r>
+              <a:rPr sz="300" b="0" i="0"/>
+              <a:t/>
+            </a:r>
           </a:p>
           <a:p>
             <a:pPr algn="l"/>
